--- a/ゲーム科2年/01_後期/キャリアデザインⅢ/コードの質を上げる.pptx
+++ b/ゲーム科2年/01_後期/キャリアデザインⅢ/コードの質を上げる.pptx
@@ -7,6 +7,11 @@
   <p:sldIdLst>
     <p:sldId id="257" r:id="rId2"/>
     <p:sldId id="258" r:id="rId3"/>
+    <p:sldId id="259" r:id="rId4"/>
+    <p:sldId id="260" r:id="rId5"/>
+    <p:sldId id="261" r:id="rId6"/>
+    <p:sldId id="262" r:id="rId7"/>
+    <p:sldId id="263" r:id="rId8"/>
   </p:sldIdLst>
   <p:sldSz cx="12192000" cy="6858000"/>
   <p:notesSz cx="6858000" cy="9144000"/>
@@ -3666,7 +3671,7 @@
         <p:spPr>
           <a:xfrm>
             <a:off x="567542" y="1216429"/>
-            <a:ext cx="8186857" cy="2308324"/>
+            <a:ext cx="9725739" cy="2308324"/>
           </a:xfrm>
           <a:prstGeom prst="rect">
             <a:avLst/>
@@ -3756,7 +3761,7 @@
                   <a:srgbClr val="FF0000"/>
                 </a:solidFill>
               </a:rPr>
-              <a:t>警告は１つでもあると採用されないと思ってください。</a:t>
+              <a:t>警告は１つでもあると企業からは採用されないと思ってください。</a:t>
             </a:r>
             <a:endParaRPr kumimoji="1" lang="en-US" altLang="ja-JP" sz="2400" b="1" dirty="0">
               <a:solidFill>
@@ -4110,6 +4115,1361 @@
     <p:extLst>
       <p:ext uri="{BB962C8B-B14F-4D97-AF65-F5344CB8AC3E}">
         <p14:creationId xmlns:p14="http://schemas.microsoft.com/office/powerpoint/2010/main" val="1992521373"/>
+      </p:ext>
+    </p:extLst>
+  </p:cSld>
+  <p:clrMapOvr>
+    <a:masterClrMapping/>
+  </p:clrMapOvr>
+</p:sld>
+</file>
+
+<file path=ppt/slides/slide3.xml><?xml version="1.0" encoding="utf-8"?>
+<p:sld xmlns:a="http://schemas.openxmlformats.org/drawingml/2006/main" xmlns:r="http://schemas.openxmlformats.org/officeDocument/2006/relationships" xmlns:p="http://schemas.openxmlformats.org/presentationml/2006/main">
+  <p:cSld>
+    <p:spTree>
+      <p:nvGrpSpPr>
+        <p:cNvPr id="1" name=""/>
+        <p:cNvGrpSpPr/>
+        <p:nvPr/>
+      </p:nvGrpSpPr>
+      <p:grpSpPr>
+        <a:xfrm>
+          <a:off x="0" y="0"/>
+          <a:ext cx="0" cy="0"/>
+          <a:chOff x="0" y="0"/>
+          <a:chExt cx="0" cy="0"/>
+        </a:xfrm>
+      </p:grpSpPr>
+      <p:sp>
+        <p:nvSpPr>
+          <p:cNvPr id="4" name="テキスト ボックス 3">
+            <a:extLst>
+              <a:ext uri="{FF2B5EF4-FFF2-40B4-BE49-F238E27FC236}">
+                <a16:creationId xmlns:a16="http://schemas.microsoft.com/office/drawing/2014/main" id="{5A13BF46-B8C5-48AA-8308-C9ECFF431A18}"/>
+              </a:ext>
+            </a:extLst>
+          </p:cNvPr>
+          <p:cNvSpPr txBox="1"/>
+          <p:nvPr/>
+        </p:nvSpPr>
+        <p:spPr>
+          <a:xfrm>
+            <a:off x="567542" y="491954"/>
+            <a:ext cx="1826141" cy="584775"/>
+          </a:xfrm>
+          <a:prstGeom prst="rect">
+            <a:avLst/>
+          </a:prstGeom>
+          <a:noFill/>
+        </p:spPr>
+        <p:txBody>
+          <a:bodyPr wrap="none" rtlCol="0">
+            <a:spAutoFit/>
+          </a:bodyPr>
+          <a:lstStyle/>
+          <a:p>
+            <a:r>
+              <a:rPr kumimoji="1" lang="ja-JP" altLang="en-US" sz="3200" b="1" u="sng" dirty="0"/>
+              <a:t>参照渡し</a:t>
+            </a:r>
+            <a:endParaRPr kumimoji="1" lang="en-US" altLang="ja-JP" sz="3200" b="1" u="sng" dirty="0"/>
+          </a:p>
+        </p:txBody>
+      </p:sp>
+      <p:sp>
+        <p:nvSpPr>
+          <p:cNvPr id="6" name="テキスト ボックス 5">
+            <a:extLst>
+              <a:ext uri="{FF2B5EF4-FFF2-40B4-BE49-F238E27FC236}">
+                <a16:creationId xmlns:a16="http://schemas.microsoft.com/office/drawing/2014/main" id="{55830AD6-028B-4C4E-80BF-B70DFC1C3A46}"/>
+              </a:ext>
+            </a:extLst>
+          </p:cNvPr>
+          <p:cNvSpPr txBox="1"/>
+          <p:nvPr/>
+        </p:nvSpPr>
+        <p:spPr>
+          <a:xfrm>
+            <a:off x="567542" y="1216429"/>
+            <a:ext cx="9110186" cy="830997"/>
+          </a:xfrm>
+          <a:prstGeom prst="rect">
+            <a:avLst/>
+          </a:prstGeom>
+          <a:noFill/>
+        </p:spPr>
+        <p:txBody>
+          <a:bodyPr wrap="none" rtlCol="0">
+            <a:spAutoFit/>
+          </a:bodyPr>
+          <a:lstStyle/>
+          <a:p>
+            <a:r>
+              <a:rPr kumimoji="1" lang="ja-JP" altLang="en-US" sz="2400" dirty="0"/>
+              <a:t>クラスや構造体など大きな変数の受け渡しは、</a:t>
+            </a:r>
+            <a:endParaRPr kumimoji="1" lang="en-US" altLang="ja-JP" sz="2400" dirty="0"/>
+          </a:p>
+          <a:p>
+            <a:r>
+              <a:rPr kumimoji="1" lang="ja-JP" altLang="en-US" sz="2400" dirty="0"/>
+              <a:t>値渡し（代入）ではなく</a:t>
+            </a:r>
+            <a:r>
+              <a:rPr kumimoji="1" lang="ja-JP" altLang="en-US" sz="2400" b="1" dirty="0">
+                <a:solidFill>
+                  <a:srgbClr val="FF0000"/>
+                </a:solidFill>
+              </a:rPr>
+              <a:t>参照渡し</a:t>
+            </a:r>
+            <a:r>
+              <a:rPr kumimoji="1" lang="ja-JP" altLang="en-US" sz="2400" dirty="0"/>
+              <a:t>にすると処理が軽くなります。</a:t>
+            </a:r>
+            <a:endParaRPr kumimoji="1" lang="en-US" altLang="ja-JP" sz="2400" dirty="0"/>
+          </a:p>
+        </p:txBody>
+      </p:sp>
+      <p:pic>
+        <p:nvPicPr>
+          <p:cNvPr id="5" name="図 4">
+            <a:extLst>
+              <a:ext uri="{FF2B5EF4-FFF2-40B4-BE49-F238E27FC236}">
+                <a16:creationId xmlns:a16="http://schemas.microsoft.com/office/drawing/2014/main" id="{B49CAE3A-0F83-4056-8B9C-9AE87FA0CB54}"/>
+              </a:ext>
+            </a:extLst>
+          </p:cNvPr>
+          <p:cNvPicPr>
+            <a:picLocks noChangeAspect="1"/>
+          </p:cNvPicPr>
+          <p:nvPr/>
+        </p:nvPicPr>
+        <p:blipFill>
+          <a:blip r:embed="rId2"/>
+          <a:stretch>
+            <a:fillRect/>
+          </a:stretch>
+        </p:blipFill>
+        <p:spPr>
+          <a:xfrm>
+            <a:off x="567542" y="3018122"/>
+            <a:ext cx="4202191" cy="1680877"/>
+          </a:xfrm>
+          <a:prstGeom prst="rect">
+            <a:avLst/>
+          </a:prstGeom>
+        </p:spPr>
+      </p:pic>
+      <p:pic>
+        <p:nvPicPr>
+          <p:cNvPr id="12" name="図 11">
+            <a:extLst>
+              <a:ext uri="{FF2B5EF4-FFF2-40B4-BE49-F238E27FC236}">
+                <a16:creationId xmlns:a16="http://schemas.microsoft.com/office/drawing/2014/main" id="{D27A7880-FFD5-4D23-8618-9BB0CA47080B}"/>
+              </a:ext>
+            </a:extLst>
+          </p:cNvPr>
+          <p:cNvPicPr>
+            <a:picLocks noChangeAspect="1"/>
+          </p:cNvPicPr>
+          <p:nvPr/>
+        </p:nvPicPr>
+        <p:blipFill>
+          <a:blip r:embed="rId3"/>
+          <a:stretch>
+            <a:fillRect/>
+          </a:stretch>
+        </p:blipFill>
+        <p:spPr>
+          <a:xfrm>
+            <a:off x="5604445" y="3018122"/>
+            <a:ext cx="4202191" cy="1432565"/>
+          </a:xfrm>
+          <a:prstGeom prst="rect">
+            <a:avLst/>
+          </a:prstGeom>
+        </p:spPr>
+      </p:pic>
+      <p:sp>
+        <p:nvSpPr>
+          <p:cNvPr id="13" name="テキスト ボックス 12">
+            <a:extLst>
+              <a:ext uri="{FF2B5EF4-FFF2-40B4-BE49-F238E27FC236}">
+                <a16:creationId xmlns:a16="http://schemas.microsoft.com/office/drawing/2014/main" id="{9ADD7FEA-5C9B-4EB5-B16E-D46B5C61E910}"/>
+              </a:ext>
+            </a:extLst>
+          </p:cNvPr>
+          <p:cNvSpPr txBox="1"/>
+          <p:nvPr/>
+        </p:nvSpPr>
+        <p:spPr>
+          <a:xfrm>
+            <a:off x="567542" y="2556459"/>
+            <a:ext cx="1491114" cy="461665"/>
+          </a:xfrm>
+          <a:prstGeom prst="rect">
+            <a:avLst/>
+          </a:prstGeom>
+          <a:noFill/>
+        </p:spPr>
+        <p:txBody>
+          <a:bodyPr wrap="none" rtlCol="0">
+            <a:spAutoFit/>
+          </a:bodyPr>
+          <a:lstStyle/>
+          <a:p>
+            <a:r>
+              <a:rPr kumimoji="1" lang="ja-JP" altLang="en-US" sz="2400" b="1" dirty="0">
+                <a:solidFill>
+                  <a:srgbClr val="0070C0"/>
+                </a:solidFill>
+              </a:rPr>
+              <a:t>■</a:t>
+            </a:r>
+            <a:r>
+              <a:rPr kumimoji="1" lang="en-US" altLang="ja-JP" sz="2400" b="1" dirty="0">
+                <a:solidFill>
+                  <a:srgbClr val="0070C0"/>
+                </a:solidFill>
+              </a:rPr>
+              <a:t>Before</a:t>
+            </a:r>
+          </a:p>
+        </p:txBody>
+      </p:sp>
+      <p:sp>
+        <p:nvSpPr>
+          <p:cNvPr id="14" name="テキスト ボックス 13">
+            <a:extLst>
+              <a:ext uri="{FF2B5EF4-FFF2-40B4-BE49-F238E27FC236}">
+                <a16:creationId xmlns:a16="http://schemas.microsoft.com/office/drawing/2014/main" id="{DDA9B379-29EC-4B0D-9D91-642EA2716537}"/>
+              </a:ext>
+            </a:extLst>
+          </p:cNvPr>
+          <p:cNvSpPr txBox="1"/>
+          <p:nvPr/>
+        </p:nvSpPr>
+        <p:spPr>
+          <a:xfrm>
+            <a:off x="5604445" y="2556458"/>
+            <a:ext cx="1237839" cy="461665"/>
+          </a:xfrm>
+          <a:prstGeom prst="rect">
+            <a:avLst/>
+          </a:prstGeom>
+          <a:noFill/>
+        </p:spPr>
+        <p:txBody>
+          <a:bodyPr wrap="none" rtlCol="0">
+            <a:spAutoFit/>
+          </a:bodyPr>
+          <a:lstStyle/>
+          <a:p>
+            <a:r>
+              <a:rPr kumimoji="1" lang="ja-JP" altLang="en-US" sz="2400" b="1" dirty="0">
+                <a:solidFill>
+                  <a:srgbClr val="FF0000"/>
+                </a:solidFill>
+              </a:rPr>
+              <a:t>■</a:t>
+            </a:r>
+            <a:r>
+              <a:rPr kumimoji="1" lang="en-US" altLang="ja-JP" sz="2400" b="1" dirty="0">
+                <a:solidFill>
+                  <a:srgbClr val="FF0000"/>
+                </a:solidFill>
+              </a:rPr>
+              <a:t>After</a:t>
+            </a:r>
+          </a:p>
+        </p:txBody>
+      </p:sp>
+      <p:sp>
+        <p:nvSpPr>
+          <p:cNvPr id="15" name="テキスト ボックス 14">
+            <a:extLst>
+              <a:ext uri="{FF2B5EF4-FFF2-40B4-BE49-F238E27FC236}">
+                <a16:creationId xmlns:a16="http://schemas.microsoft.com/office/drawing/2014/main" id="{3002F28B-F1DB-4DEC-ADA2-509B77126F97}"/>
+              </a:ext>
+            </a:extLst>
+          </p:cNvPr>
+          <p:cNvSpPr txBox="1"/>
+          <p:nvPr/>
+        </p:nvSpPr>
+        <p:spPr>
+          <a:xfrm>
+            <a:off x="567541" y="4933295"/>
+            <a:ext cx="9110186" cy="1569660"/>
+          </a:xfrm>
+          <a:prstGeom prst="rect">
+            <a:avLst/>
+          </a:prstGeom>
+          <a:noFill/>
+        </p:spPr>
+        <p:txBody>
+          <a:bodyPr wrap="none" rtlCol="0">
+            <a:spAutoFit/>
+          </a:bodyPr>
+          <a:lstStyle/>
+          <a:p>
+            <a:r>
+              <a:rPr lang="ja-JP" altLang="en-US" sz="2400" b="1" dirty="0">
+                <a:solidFill>
+                  <a:srgbClr val="FF0000"/>
+                </a:solidFill>
+              </a:rPr>
+              <a:t>値渡しはすべてのメンバ変数に対してコピー</a:t>
+            </a:r>
+            <a:r>
+              <a:rPr lang="ja-JP" altLang="en-US" sz="2400" dirty="0"/>
+              <a:t>が実行されますが、</a:t>
+            </a:r>
+            <a:endParaRPr lang="en-US" altLang="ja-JP" sz="2400" dirty="0"/>
+          </a:p>
+          <a:p>
+            <a:r>
+              <a:rPr lang="ja-JP" altLang="en-US" sz="2400" b="1" dirty="0">
+                <a:solidFill>
+                  <a:srgbClr val="FF0000"/>
+                </a:solidFill>
+              </a:rPr>
+              <a:t>参照渡しだと、アドレス１つのコピー</a:t>
+            </a:r>
+            <a:r>
+              <a:rPr lang="ja-JP" altLang="en-US" sz="2400" dirty="0"/>
+              <a:t>で完結します。</a:t>
+            </a:r>
+            <a:endParaRPr lang="en-US" altLang="ja-JP" sz="2400" dirty="0"/>
+          </a:p>
+          <a:p>
+            <a:endParaRPr lang="en-US" altLang="ja-JP" sz="2400" dirty="0"/>
+          </a:p>
+          <a:p>
+            <a:r>
+              <a:rPr lang="en-US" altLang="ja-JP" sz="2400" b="1" dirty="0">
+                <a:solidFill>
+                  <a:srgbClr val="00B050"/>
+                </a:solidFill>
+              </a:rPr>
+              <a:t>※</a:t>
+            </a:r>
+            <a:r>
+              <a:rPr lang="ja-JP" altLang="en-US" sz="2400" b="1" dirty="0">
+                <a:solidFill>
+                  <a:srgbClr val="00B050"/>
+                </a:solidFill>
+              </a:rPr>
+              <a:t>ただの</a:t>
+            </a:r>
+            <a:r>
+              <a:rPr lang="en-US" altLang="ja-JP" sz="2400" b="1" dirty="0">
+                <a:solidFill>
+                  <a:srgbClr val="00B050"/>
+                </a:solidFill>
+              </a:rPr>
+              <a:t>int</a:t>
+            </a:r>
+            <a:r>
+              <a:rPr lang="ja-JP" altLang="en-US" sz="2400" b="1" dirty="0">
+                <a:solidFill>
+                  <a:srgbClr val="00B050"/>
+                </a:solidFill>
+              </a:rPr>
+              <a:t>型などを参照渡しにしても効果はありません</a:t>
+            </a:r>
+            <a:endParaRPr lang="en-US" altLang="ja-JP" sz="2400" b="1" dirty="0">
+              <a:solidFill>
+                <a:srgbClr val="00B050"/>
+              </a:solidFill>
+            </a:endParaRPr>
+          </a:p>
+        </p:txBody>
+      </p:sp>
+    </p:spTree>
+    <p:extLst>
+      <p:ext uri="{BB962C8B-B14F-4D97-AF65-F5344CB8AC3E}">
+        <p14:creationId xmlns:p14="http://schemas.microsoft.com/office/powerpoint/2010/main" val="4252101546"/>
+      </p:ext>
+    </p:extLst>
+  </p:cSld>
+  <p:clrMapOvr>
+    <a:masterClrMapping/>
+  </p:clrMapOvr>
+</p:sld>
+</file>
+
+<file path=ppt/slides/slide4.xml><?xml version="1.0" encoding="utf-8"?>
+<p:sld xmlns:a="http://schemas.openxmlformats.org/drawingml/2006/main" xmlns:r="http://schemas.openxmlformats.org/officeDocument/2006/relationships" xmlns:p="http://schemas.openxmlformats.org/presentationml/2006/main">
+  <p:cSld>
+    <p:spTree>
+      <p:nvGrpSpPr>
+        <p:cNvPr id="1" name=""/>
+        <p:cNvGrpSpPr/>
+        <p:nvPr/>
+      </p:nvGrpSpPr>
+      <p:grpSpPr>
+        <a:xfrm>
+          <a:off x="0" y="0"/>
+          <a:ext cx="0" cy="0"/>
+          <a:chOff x="0" y="0"/>
+          <a:chExt cx="0" cy="0"/>
+        </a:xfrm>
+      </p:grpSpPr>
+      <p:sp>
+        <p:nvSpPr>
+          <p:cNvPr id="4" name="テキスト ボックス 3">
+            <a:extLst>
+              <a:ext uri="{FF2B5EF4-FFF2-40B4-BE49-F238E27FC236}">
+                <a16:creationId xmlns:a16="http://schemas.microsoft.com/office/drawing/2014/main" id="{5A13BF46-B8C5-48AA-8308-C9ECFF431A18}"/>
+              </a:ext>
+            </a:extLst>
+          </p:cNvPr>
+          <p:cNvSpPr txBox="1"/>
+          <p:nvPr/>
+        </p:nvSpPr>
+        <p:spPr>
+          <a:xfrm>
+            <a:off x="567542" y="491954"/>
+            <a:ext cx="3861955" cy="584775"/>
+          </a:xfrm>
+          <a:prstGeom prst="rect">
+            <a:avLst/>
+          </a:prstGeom>
+          <a:noFill/>
+        </p:spPr>
+        <p:txBody>
+          <a:bodyPr wrap="none" rtlCol="0">
+            <a:spAutoFit/>
+          </a:bodyPr>
+          <a:lstStyle/>
+          <a:p>
+            <a:r>
+              <a:rPr lang="en-US" altLang="ja-JP" sz="3200" b="1" u="sng" dirty="0"/>
+              <a:t>c</a:t>
+            </a:r>
+            <a:r>
+              <a:rPr kumimoji="1" lang="en-US" altLang="ja-JP" sz="3200" b="1" u="sng" dirty="0"/>
+              <a:t>onst</a:t>
+            </a:r>
+            <a:r>
+              <a:rPr lang="ja-JP" altLang="en-US" sz="3200" b="1" u="sng" dirty="0"/>
+              <a:t>修飾子 その１</a:t>
+            </a:r>
+            <a:endParaRPr kumimoji="1" lang="en-US" altLang="ja-JP" sz="3200" b="1" u="sng" dirty="0"/>
+          </a:p>
+        </p:txBody>
+      </p:sp>
+      <p:sp>
+        <p:nvSpPr>
+          <p:cNvPr id="6" name="テキスト ボックス 5">
+            <a:extLst>
+              <a:ext uri="{FF2B5EF4-FFF2-40B4-BE49-F238E27FC236}">
+                <a16:creationId xmlns:a16="http://schemas.microsoft.com/office/drawing/2014/main" id="{55830AD6-028B-4C4E-80BF-B70DFC1C3A46}"/>
+              </a:ext>
+            </a:extLst>
+          </p:cNvPr>
+          <p:cNvSpPr txBox="1"/>
+          <p:nvPr/>
+        </p:nvSpPr>
+        <p:spPr>
+          <a:xfrm>
+            <a:off x="567542" y="1216429"/>
+            <a:ext cx="10241906" cy="3416320"/>
+          </a:xfrm>
+          <a:prstGeom prst="rect">
+            <a:avLst/>
+          </a:prstGeom>
+          <a:noFill/>
+        </p:spPr>
+        <p:txBody>
+          <a:bodyPr wrap="none" rtlCol="0">
+            <a:spAutoFit/>
+          </a:bodyPr>
+          <a:lstStyle/>
+          <a:p>
+            <a:r>
+              <a:rPr kumimoji="1" lang="ja-JP" altLang="en-US" sz="2400" dirty="0"/>
+              <a:t>参照先を書き換えてはいけないポインタ変数には</a:t>
+            </a:r>
+            <a:r>
+              <a:rPr kumimoji="1" lang="en-US" altLang="ja-JP" sz="2400" b="1" dirty="0">
+                <a:solidFill>
+                  <a:srgbClr val="0070C0"/>
+                </a:solidFill>
+              </a:rPr>
+              <a:t>const</a:t>
+            </a:r>
+            <a:r>
+              <a:rPr kumimoji="1" lang="ja-JP" altLang="en-US" sz="2400" dirty="0"/>
+              <a:t>をつけましょう。</a:t>
+            </a:r>
+            <a:endParaRPr kumimoji="1" lang="en-US" altLang="ja-JP" sz="2400" dirty="0"/>
+          </a:p>
+          <a:p>
+            <a:endParaRPr lang="en-US" altLang="ja-JP" sz="2400" dirty="0"/>
+          </a:p>
+          <a:p>
+            <a:r>
+              <a:rPr lang="ja-JP" altLang="en-US" sz="2400" dirty="0"/>
+              <a:t>・当たり判定対象の引数</a:t>
+            </a:r>
+            <a:endParaRPr lang="en-US" altLang="ja-JP" sz="2400" dirty="0"/>
+          </a:p>
+          <a:p>
+            <a:endParaRPr kumimoji="1" lang="en-US" altLang="ja-JP" sz="2400" dirty="0"/>
+          </a:p>
+          <a:p>
+            <a:endParaRPr lang="en-US" altLang="ja-JP" sz="2400" dirty="0"/>
+          </a:p>
+          <a:p>
+            <a:endParaRPr kumimoji="1" lang="en-US" altLang="ja-JP" sz="2400" dirty="0"/>
+          </a:p>
+          <a:p>
+            <a:endParaRPr lang="en-US" altLang="ja-JP" sz="2400" dirty="0"/>
+          </a:p>
+          <a:p>
+            <a:endParaRPr kumimoji="1" lang="en-US" altLang="ja-JP" sz="2400" dirty="0"/>
+          </a:p>
+          <a:p>
+            <a:r>
+              <a:rPr lang="ja-JP" altLang="en-US" sz="2400" dirty="0"/>
+              <a:t>・ファイルパスなどの文字列</a:t>
+            </a:r>
+            <a:endParaRPr kumimoji="1" lang="en-US" altLang="ja-JP" sz="2400" dirty="0"/>
+          </a:p>
+        </p:txBody>
+      </p:sp>
+      <p:pic>
+        <p:nvPicPr>
+          <p:cNvPr id="3" name="図 2">
+            <a:extLst>
+              <a:ext uri="{FF2B5EF4-FFF2-40B4-BE49-F238E27FC236}">
+                <a16:creationId xmlns:a16="http://schemas.microsoft.com/office/drawing/2014/main" id="{F2BFECCF-8A02-4579-BD6C-002F1A14C1FA}"/>
+              </a:ext>
+            </a:extLst>
+          </p:cNvPr>
+          <p:cNvPicPr>
+            <a:picLocks noChangeAspect="1"/>
+          </p:cNvPicPr>
+          <p:nvPr/>
+        </p:nvPicPr>
+        <p:blipFill>
+          <a:blip r:embed="rId2"/>
+          <a:stretch>
+            <a:fillRect/>
+          </a:stretch>
+        </p:blipFill>
+        <p:spPr>
+          <a:xfrm>
+            <a:off x="567542" y="2413555"/>
+            <a:ext cx="5054325" cy="1301413"/>
+          </a:xfrm>
+          <a:prstGeom prst="rect">
+            <a:avLst/>
+          </a:prstGeom>
+        </p:spPr>
+      </p:pic>
+      <p:pic>
+        <p:nvPicPr>
+          <p:cNvPr id="8" name="図 7">
+            <a:extLst>
+              <a:ext uri="{FF2B5EF4-FFF2-40B4-BE49-F238E27FC236}">
+                <a16:creationId xmlns:a16="http://schemas.microsoft.com/office/drawing/2014/main" id="{BADC767C-0ED0-42CF-908F-663B594E67E3}"/>
+              </a:ext>
+            </a:extLst>
+          </p:cNvPr>
+          <p:cNvPicPr>
+            <a:picLocks noChangeAspect="1"/>
+          </p:cNvPicPr>
+          <p:nvPr/>
+        </p:nvPicPr>
+        <p:blipFill>
+          <a:blip r:embed="rId3"/>
+          <a:stretch>
+            <a:fillRect/>
+          </a:stretch>
+        </p:blipFill>
+        <p:spPr>
+          <a:xfrm>
+            <a:off x="567542" y="4632749"/>
+            <a:ext cx="4537858" cy="1607902"/>
+          </a:xfrm>
+          <a:prstGeom prst="rect">
+            <a:avLst/>
+          </a:prstGeom>
+        </p:spPr>
+      </p:pic>
+    </p:spTree>
+    <p:extLst>
+      <p:ext uri="{BB962C8B-B14F-4D97-AF65-F5344CB8AC3E}">
+        <p14:creationId xmlns:p14="http://schemas.microsoft.com/office/powerpoint/2010/main" val="86562508"/>
+      </p:ext>
+    </p:extLst>
+  </p:cSld>
+  <p:clrMapOvr>
+    <a:masterClrMapping/>
+  </p:clrMapOvr>
+</p:sld>
+</file>
+
+<file path=ppt/slides/slide5.xml><?xml version="1.0" encoding="utf-8"?>
+<p:sld xmlns:a="http://schemas.openxmlformats.org/drawingml/2006/main" xmlns:r="http://schemas.openxmlformats.org/officeDocument/2006/relationships" xmlns:p="http://schemas.openxmlformats.org/presentationml/2006/main">
+  <p:cSld>
+    <p:spTree>
+      <p:nvGrpSpPr>
+        <p:cNvPr id="1" name=""/>
+        <p:cNvGrpSpPr/>
+        <p:nvPr/>
+      </p:nvGrpSpPr>
+      <p:grpSpPr>
+        <a:xfrm>
+          <a:off x="0" y="0"/>
+          <a:ext cx="0" cy="0"/>
+          <a:chOff x="0" y="0"/>
+          <a:chExt cx="0" cy="0"/>
+        </a:xfrm>
+      </p:grpSpPr>
+      <p:sp>
+        <p:nvSpPr>
+          <p:cNvPr id="4" name="テキスト ボックス 3">
+            <a:extLst>
+              <a:ext uri="{FF2B5EF4-FFF2-40B4-BE49-F238E27FC236}">
+                <a16:creationId xmlns:a16="http://schemas.microsoft.com/office/drawing/2014/main" id="{5A13BF46-B8C5-48AA-8308-C9ECFF431A18}"/>
+              </a:ext>
+            </a:extLst>
+          </p:cNvPr>
+          <p:cNvSpPr txBox="1"/>
+          <p:nvPr/>
+        </p:nvSpPr>
+        <p:spPr>
+          <a:xfrm>
+            <a:off x="567542" y="491954"/>
+            <a:ext cx="3861955" cy="584775"/>
+          </a:xfrm>
+          <a:prstGeom prst="rect">
+            <a:avLst/>
+          </a:prstGeom>
+          <a:noFill/>
+        </p:spPr>
+        <p:txBody>
+          <a:bodyPr wrap="none" rtlCol="0">
+            <a:spAutoFit/>
+          </a:bodyPr>
+          <a:lstStyle/>
+          <a:p>
+            <a:r>
+              <a:rPr lang="en-US" altLang="ja-JP" sz="3200" b="1" u="sng" dirty="0"/>
+              <a:t>c</a:t>
+            </a:r>
+            <a:r>
+              <a:rPr kumimoji="1" lang="en-US" altLang="ja-JP" sz="3200" b="1" u="sng" dirty="0"/>
+              <a:t>onst</a:t>
+            </a:r>
+            <a:r>
+              <a:rPr lang="ja-JP" altLang="en-US" sz="3200" b="1" u="sng" dirty="0"/>
+              <a:t>修飾子 その２</a:t>
+            </a:r>
+            <a:endParaRPr kumimoji="1" lang="en-US" altLang="ja-JP" sz="3200" b="1" u="sng" dirty="0"/>
+          </a:p>
+        </p:txBody>
+      </p:sp>
+      <p:sp>
+        <p:nvSpPr>
+          <p:cNvPr id="6" name="テキスト ボックス 5">
+            <a:extLst>
+              <a:ext uri="{FF2B5EF4-FFF2-40B4-BE49-F238E27FC236}">
+                <a16:creationId xmlns:a16="http://schemas.microsoft.com/office/drawing/2014/main" id="{55830AD6-028B-4C4E-80BF-B70DFC1C3A46}"/>
+              </a:ext>
+            </a:extLst>
+          </p:cNvPr>
+          <p:cNvSpPr txBox="1"/>
+          <p:nvPr/>
+        </p:nvSpPr>
+        <p:spPr>
+          <a:xfrm>
+            <a:off x="567542" y="1216429"/>
+            <a:ext cx="10857459" cy="3046988"/>
+          </a:xfrm>
+          <a:prstGeom prst="rect">
+            <a:avLst/>
+          </a:prstGeom>
+          <a:noFill/>
+        </p:spPr>
+        <p:txBody>
+          <a:bodyPr wrap="none" rtlCol="0">
+            <a:spAutoFit/>
+          </a:bodyPr>
+          <a:lstStyle/>
+          <a:p>
+            <a:r>
+              <a:rPr kumimoji="1" lang="ja-JP" altLang="en-US" sz="2400" dirty="0"/>
+              <a:t>呼び出してもメンバ変数が変わらないメンバ関数には</a:t>
+            </a:r>
+            <a:r>
+              <a:rPr kumimoji="1" lang="en-US" altLang="ja-JP" sz="2400" b="1" dirty="0">
+                <a:solidFill>
+                  <a:srgbClr val="0070C0"/>
+                </a:solidFill>
+              </a:rPr>
+              <a:t>const</a:t>
+            </a:r>
+            <a:r>
+              <a:rPr kumimoji="1" lang="ja-JP" altLang="en-US" sz="2400" dirty="0"/>
+              <a:t>をつけましょう。</a:t>
+            </a:r>
+            <a:endParaRPr kumimoji="1" lang="en-US" altLang="ja-JP" sz="2400" dirty="0"/>
+          </a:p>
+          <a:p>
+            <a:endParaRPr lang="en-US" altLang="ja-JP" sz="2400" dirty="0"/>
+          </a:p>
+          <a:p>
+            <a:r>
+              <a:rPr kumimoji="1" lang="ja-JP" altLang="en-US" sz="2400" dirty="0"/>
+              <a:t>・各ゲッター関数など</a:t>
+            </a:r>
+            <a:endParaRPr kumimoji="1" lang="en-US" altLang="ja-JP" sz="2400" dirty="0"/>
+          </a:p>
+          <a:p>
+            <a:endParaRPr lang="en-US" altLang="ja-JP" sz="2400" dirty="0"/>
+          </a:p>
+          <a:p>
+            <a:endParaRPr kumimoji="1" lang="en-US" altLang="ja-JP" sz="2400" dirty="0"/>
+          </a:p>
+          <a:p>
+            <a:r>
+              <a:rPr lang="en-US" altLang="ja-JP" sz="2400" dirty="0"/>
+              <a:t>or</a:t>
+            </a:r>
+            <a:endParaRPr kumimoji="1" lang="en-US" altLang="ja-JP" sz="2400" dirty="0"/>
+          </a:p>
+          <a:p>
+            <a:endParaRPr lang="en-US" altLang="ja-JP" sz="2400" dirty="0"/>
+          </a:p>
+          <a:p>
+            <a:endParaRPr kumimoji="1" lang="en-US" altLang="ja-JP" sz="2400" dirty="0"/>
+          </a:p>
+        </p:txBody>
+      </p:sp>
+      <p:pic>
+        <p:nvPicPr>
+          <p:cNvPr id="15" name="図 14">
+            <a:extLst>
+              <a:ext uri="{FF2B5EF4-FFF2-40B4-BE49-F238E27FC236}">
+                <a16:creationId xmlns:a16="http://schemas.microsoft.com/office/drawing/2014/main" id="{F936FF4E-DDDD-4C76-A279-B5F9D4B0CAA7}"/>
+              </a:ext>
+            </a:extLst>
+          </p:cNvPr>
+          <p:cNvPicPr>
+            <a:picLocks noChangeAspect="1"/>
+          </p:cNvPicPr>
+          <p:nvPr/>
+        </p:nvPicPr>
+        <p:blipFill>
+          <a:blip r:embed="rId2"/>
+          <a:stretch>
+            <a:fillRect/>
+          </a:stretch>
+        </p:blipFill>
+        <p:spPr>
+          <a:xfrm>
+            <a:off x="567542" y="2333076"/>
+            <a:ext cx="4534533" cy="647790"/>
+          </a:xfrm>
+          <a:prstGeom prst="rect">
+            <a:avLst/>
+          </a:prstGeom>
+        </p:spPr>
+      </p:pic>
+      <p:pic>
+        <p:nvPicPr>
+          <p:cNvPr id="19" name="図 18">
+            <a:extLst>
+              <a:ext uri="{FF2B5EF4-FFF2-40B4-BE49-F238E27FC236}">
+                <a16:creationId xmlns:a16="http://schemas.microsoft.com/office/drawing/2014/main" id="{4C37AE9D-370F-44DF-9A57-05C2C309BA39}"/>
+              </a:ext>
+            </a:extLst>
+          </p:cNvPr>
+          <p:cNvPicPr>
+            <a:picLocks noChangeAspect="1"/>
+          </p:cNvPicPr>
+          <p:nvPr/>
+        </p:nvPicPr>
+        <p:blipFill>
+          <a:blip r:embed="rId3"/>
+          <a:stretch>
+            <a:fillRect/>
+          </a:stretch>
+        </p:blipFill>
+        <p:spPr>
+          <a:xfrm>
+            <a:off x="567542" y="3567529"/>
+            <a:ext cx="6620799" cy="619211"/>
+          </a:xfrm>
+          <a:prstGeom prst="rect">
+            <a:avLst/>
+          </a:prstGeom>
+        </p:spPr>
+      </p:pic>
+    </p:spTree>
+    <p:extLst>
+      <p:ext uri="{BB962C8B-B14F-4D97-AF65-F5344CB8AC3E}">
+        <p14:creationId xmlns:p14="http://schemas.microsoft.com/office/powerpoint/2010/main" val="1729654492"/>
+      </p:ext>
+    </p:extLst>
+  </p:cSld>
+  <p:clrMapOvr>
+    <a:masterClrMapping/>
+  </p:clrMapOvr>
+</p:sld>
+</file>
+
+<file path=ppt/slides/slide6.xml><?xml version="1.0" encoding="utf-8"?>
+<p:sld xmlns:a="http://schemas.openxmlformats.org/drawingml/2006/main" xmlns:r="http://schemas.openxmlformats.org/officeDocument/2006/relationships" xmlns:p="http://schemas.openxmlformats.org/presentationml/2006/main">
+  <p:cSld>
+    <p:spTree>
+      <p:nvGrpSpPr>
+        <p:cNvPr id="1" name=""/>
+        <p:cNvGrpSpPr/>
+        <p:nvPr/>
+      </p:nvGrpSpPr>
+      <p:grpSpPr>
+        <a:xfrm>
+          <a:off x="0" y="0"/>
+          <a:ext cx="0" cy="0"/>
+          <a:chOff x="0" y="0"/>
+          <a:chExt cx="0" cy="0"/>
+        </a:xfrm>
+      </p:grpSpPr>
+      <p:sp>
+        <p:nvSpPr>
+          <p:cNvPr id="4" name="テキスト ボックス 3">
+            <a:extLst>
+              <a:ext uri="{FF2B5EF4-FFF2-40B4-BE49-F238E27FC236}">
+                <a16:creationId xmlns:a16="http://schemas.microsoft.com/office/drawing/2014/main" id="{5A13BF46-B8C5-48AA-8308-C9ECFF431A18}"/>
+              </a:ext>
+            </a:extLst>
+          </p:cNvPr>
+          <p:cNvSpPr txBox="1"/>
+          <p:nvPr/>
+        </p:nvSpPr>
+        <p:spPr>
+          <a:xfrm>
+            <a:off x="567542" y="491954"/>
+            <a:ext cx="3504486" cy="584775"/>
+          </a:xfrm>
+          <a:prstGeom prst="rect">
+            <a:avLst/>
+          </a:prstGeom>
+          <a:noFill/>
+        </p:spPr>
+        <p:txBody>
+          <a:bodyPr wrap="none" rtlCol="0">
+            <a:spAutoFit/>
+          </a:bodyPr>
+          <a:lstStyle/>
+          <a:p>
+            <a:r>
+              <a:rPr lang="en-US" altLang="ja-JP" sz="3200" b="1" u="sng" dirty="0" err="1"/>
+              <a:t>constexpr</a:t>
+            </a:r>
+            <a:r>
+              <a:rPr lang="ja-JP" altLang="en-US" sz="3200" b="1" u="sng" dirty="0"/>
+              <a:t>修飾子</a:t>
+            </a:r>
+            <a:endParaRPr kumimoji="1" lang="en-US" altLang="ja-JP" sz="3200" b="1" u="sng" dirty="0"/>
+          </a:p>
+        </p:txBody>
+      </p:sp>
+      <p:sp>
+        <p:nvSpPr>
+          <p:cNvPr id="6" name="テキスト ボックス 5">
+            <a:extLst>
+              <a:ext uri="{FF2B5EF4-FFF2-40B4-BE49-F238E27FC236}">
+                <a16:creationId xmlns:a16="http://schemas.microsoft.com/office/drawing/2014/main" id="{55830AD6-028B-4C4E-80BF-B70DFC1C3A46}"/>
+              </a:ext>
+            </a:extLst>
+          </p:cNvPr>
+          <p:cNvSpPr txBox="1"/>
+          <p:nvPr/>
+        </p:nvSpPr>
+        <p:spPr>
+          <a:xfrm>
+            <a:off x="567542" y="1216429"/>
+            <a:ext cx="6184706" cy="461665"/>
+          </a:xfrm>
+          <a:prstGeom prst="rect">
+            <a:avLst/>
+          </a:prstGeom>
+          <a:noFill/>
+        </p:spPr>
+        <p:txBody>
+          <a:bodyPr wrap="none" rtlCol="0">
+            <a:spAutoFit/>
+          </a:bodyPr>
+          <a:lstStyle/>
+          <a:p>
+            <a:r>
+              <a:rPr kumimoji="1" lang="en-US" altLang="ja-JP" sz="2400" b="1" dirty="0">
+                <a:solidFill>
+                  <a:srgbClr val="7030A0"/>
+                </a:solidFill>
+              </a:rPr>
+              <a:t>#define</a:t>
+            </a:r>
+            <a:r>
+              <a:rPr kumimoji="1" lang="ja-JP" altLang="en-US" sz="2400" dirty="0"/>
+              <a:t>は</a:t>
+            </a:r>
+            <a:r>
+              <a:rPr lang="en-US" altLang="ja-JP" sz="2400" b="1" dirty="0" err="1">
+                <a:solidFill>
+                  <a:srgbClr val="0070C0"/>
+                </a:solidFill>
+              </a:rPr>
+              <a:t>constexpr</a:t>
+            </a:r>
+            <a:r>
+              <a:rPr lang="ja-JP" altLang="en-US" sz="2400" dirty="0"/>
+              <a:t>に置き換えましょう。</a:t>
+            </a:r>
+            <a:endParaRPr kumimoji="1" lang="en-US" altLang="ja-JP" sz="2400" dirty="0"/>
+          </a:p>
+        </p:txBody>
+      </p:sp>
+      <p:pic>
+        <p:nvPicPr>
+          <p:cNvPr id="3" name="図 2">
+            <a:extLst>
+              <a:ext uri="{FF2B5EF4-FFF2-40B4-BE49-F238E27FC236}">
+                <a16:creationId xmlns:a16="http://schemas.microsoft.com/office/drawing/2014/main" id="{BBF47D07-8A73-4A0C-B833-42B9558F2A70}"/>
+              </a:ext>
+            </a:extLst>
+          </p:cNvPr>
+          <p:cNvPicPr>
+            <a:picLocks noChangeAspect="1"/>
+          </p:cNvPicPr>
+          <p:nvPr/>
+        </p:nvPicPr>
+        <p:blipFill>
+          <a:blip r:embed="rId2"/>
+          <a:stretch>
+            <a:fillRect/>
+          </a:stretch>
+        </p:blipFill>
+        <p:spPr>
+          <a:xfrm>
+            <a:off x="567542" y="1817794"/>
+            <a:ext cx="4258269" cy="1038370"/>
+          </a:xfrm>
+          <a:prstGeom prst="rect">
+            <a:avLst/>
+          </a:prstGeom>
+        </p:spPr>
+      </p:pic>
+      <p:sp>
+        <p:nvSpPr>
+          <p:cNvPr id="8" name="テキスト ボックス 7">
+            <a:extLst>
+              <a:ext uri="{FF2B5EF4-FFF2-40B4-BE49-F238E27FC236}">
+                <a16:creationId xmlns:a16="http://schemas.microsoft.com/office/drawing/2014/main" id="{02F7338D-6712-4D6B-8D73-9FAB2FC54B94}"/>
+              </a:ext>
+            </a:extLst>
+          </p:cNvPr>
+          <p:cNvSpPr txBox="1"/>
+          <p:nvPr/>
+        </p:nvSpPr>
+        <p:spPr>
+          <a:xfrm>
+            <a:off x="491342" y="2967335"/>
+            <a:ext cx="7879080" cy="2677656"/>
+          </a:xfrm>
+          <a:prstGeom prst="rect">
+            <a:avLst/>
+          </a:prstGeom>
+          <a:noFill/>
+        </p:spPr>
+        <p:txBody>
+          <a:bodyPr wrap="none" rtlCol="0">
+            <a:spAutoFit/>
+          </a:bodyPr>
+          <a:lstStyle/>
+          <a:p>
+            <a:r>
+              <a:rPr kumimoji="1" lang="ja-JP" altLang="en-US" sz="2400" b="1" dirty="0">
+                <a:solidFill>
+                  <a:srgbClr val="FF0000"/>
+                </a:solidFill>
+              </a:rPr>
+              <a:t>■</a:t>
+            </a:r>
+            <a:r>
+              <a:rPr lang="en-US" altLang="ja-JP" sz="2400" b="1" dirty="0" err="1">
+                <a:solidFill>
+                  <a:srgbClr val="FF0000"/>
+                </a:solidFill>
+              </a:rPr>
+              <a:t>constexpr</a:t>
+            </a:r>
+            <a:r>
+              <a:rPr lang="ja-JP" altLang="en-US" sz="2400" b="1" dirty="0">
+                <a:solidFill>
+                  <a:srgbClr val="FF0000"/>
+                </a:solidFill>
+              </a:rPr>
+              <a:t>を使う理由</a:t>
+            </a:r>
+            <a:endParaRPr lang="en-US" altLang="ja-JP" sz="2400" b="1" dirty="0">
+              <a:solidFill>
+                <a:srgbClr val="FF0000"/>
+              </a:solidFill>
+            </a:endParaRPr>
+          </a:p>
+          <a:p>
+            <a:r>
+              <a:rPr kumimoji="1" lang="ja-JP" altLang="en-US" sz="2400" dirty="0"/>
+              <a:t>・型が明確</a:t>
+            </a:r>
+            <a:endParaRPr kumimoji="1" lang="en-US" altLang="ja-JP" sz="2400" dirty="0"/>
+          </a:p>
+          <a:p>
+            <a:r>
+              <a:rPr lang="ja-JP" altLang="en-US" sz="2400" dirty="0"/>
+              <a:t>・スコープが違えば同名が使える</a:t>
+            </a:r>
+            <a:endParaRPr lang="en-US" altLang="ja-JP" sz="2400" dirty="0"/>
+          </a:p>
+          <a:p>
+            <a:r>
+              <a:rPr kumimoji="1" lang="ja-JP" altLang="en-US" sz="2400" dirty="0"/>
+              <a:t>・デバッグ中に値が見える</a:t>
+            </a:r>
+            <a:endParaRPr kumimoji="1" lang="en-US" altLang="ja-JP" sz="2400" dirty="0"/>
+          </a:p>
+          <a:p>
+            <a:r>
+              <a:rPr lang="ja-JP" altLang="en-US" sz="2400" dirty="0"/>
+              <a:t>・</a:t>
+            </a:r>
+            <a:r>
+              <a:rPr lang="en-US" altLang="ja-JP" sz="2400" b="1" dirty="0">
+                <a:solidFill>
+                  <a:srgbClr val="0070C0"/>
+                </a:solidFill>
+              </a:rPr>
+              <a:t>namespace</a:t>
+            </a:r>
+            <a:r>
+              <a:rPr lang="ja-JP" altLang="en-US" sz="2400" dirty="0"/>
+              <a:t>で括れる</a:t>
+            </a:r>
+            <a:endParaRPr lang="en-US" altLang="ja-JP" sz="2400" dirty="0"/>
+          </a:p>
+          <a:p>
+            <a:endParaRPr kumimoji="1" lang="en-US" altLang="ja-JP" sz="2400" dirty="0"/>
+          </a:p>
+          <a:p>
+            <a:r>
+              <a:rPr lang="ja-JP" altLang="en-US" sz="2400" dirty="0"/>
+              <a:t>必要に合わせて書く場所を考えられるとなお良いです。</a:t>
+            </a:r>
+            <a:endParaRPr kumimoji="1" lang="en-US" altLang="ja-JP" sz="2400" dirty="0"/>
+          </a:p>
+        </p:txBody>
+      </p:sp>
+    </p:spTree>
+    <p:extLst>
+      <p:ext uri="{BB962C8B-B14F-4D97-AF65-F5344CB8AC3E}">
+        <p14:creationId xmlns:p14="http://schemas.microsoft.com/office/powerpoint/2010/main" val="3912343143"/>
+      </p:ext>
+    </p:extLst>
+  </p:cSld>
+  <p:clrMapOvr>
+    <a:masterClrMapping/>
+  </p:clrMapOvr>
+</p:sld>
+</file>
+
+<file path=ppt/slides/slide7.xml><?xml version="1.0" encoding="utf-8"?>
+<p:sld xmlns:a="http://schemas.openxmlformats.org/drawingml/2006/main" xmlns:r="http://schemas.openxmlformats.org/officeDocument/2006/relationships" xmlns:p="http://schemas.openxmlformats.org/presentationml/2006/main">
+  <p:cSld>
+    <p:spTree>
+      <p:nvGrpSpPr>
+        <p:cNvPr id="1" name=""/>
+        <p:cNvGrpSpPr/>
+        <p:nvPr/>
+      </p:nvGrpSpPr>
+      <p:grpSpPr>
+        <a:xfrm>
+          <a:off x="0" y="0"/>
+          <a:ext cx="0" cy="0"/>
+          <a:chOff x="0" y="0"/>
+          <a:chExt cx="0" cy="0"/>
+        </a:xfrm>
+      </p:grpSpPr>
+      <p:sp>
+        <p:nvSpPr>
+          <p:cNvPr id="4" name="テキスト ボックス 3">
+            <a:extLst>
+              <a:ext uri="{FF2B5EF4-FFF2-40B4-BE49-F238E27FC236}">
+                <a16:creationId xmlns:a16="http://schemas.microsoft.com/office/drawing/2014/main" id="{5A13BF46-B8C5-48AA-8308-C9ECFF431A18}"/>
+              </a:ext>
+            </a:extLst>
+          </p:cNvPr>
+          <p:cNvSpPr txBox="1"/>
+          <p:nvPr/>
+        </p:nvSpPr>
+        <p:spPr>
+          <a:xfrm>
+            <a:off x="567542" y="491954"/>
+            <a:ext cx="2646878" cy="584775"/>
+          </a:xfrm>
+          <a:prstGeom prst="rect">
+            <a:avLst/>
+          </a:prstGeom>
+          <a:noFill/>
+        </p:spPr>
+        <p:txBody>
+          <a:bodyPr wrap="none" rtlCol="0">
+            <a:spAutoFit/>
+          </a:bodyPr>
+          <a:lstStyle/>
+          <a:p>
+            <a:r>
+              <a:rPr lang="ja-JP" altLang="en-US" sz="3200" b="1" u="sng" dirty="0"/>
+              <a:t>関数ポインタ</a:t>
+            </a:r>
+            <a:endParaRPr kumimoji="1" lang="en-US" altLang="ja-JP" sz="3200" b="1" u="sng" dirty="0"/>
+          </a:p>
+        </p:txBody>
+      </p:sp>
+      <p:sp>
+        <p:nvSpPr>
+          <p:cNvPr id="6" name="テキスト ボックス 5">
+            <a:extLst>
+              <a:ext uri="{FF2B5EF4-FFF2-40B4-BE49-F238E27FC236}">
+                <a16:creationId xmlns:a16="http://schemas.microsoft.com/office/drawing/2014/main" id="{55830AD6-028B-4C4E-80BF-B70DFC1C3A46}"/>
+              </a:ext>
+            </a:extLst>
+          </p:cNvPr>
+          <p:cNvSpPr txBox="1"/>
+          <p:nvPr/>
+        </p:nvSpPr>
+        <p:spPr>
+          <a:xfrm>
+            <a:off x="567542" y="1216429"/>
+            <a:ext cx="9761005" cy="461665"/>
+          </a:xfrm>
+          <a:prstGeom prst="rect">
+            <a:avLst/>
+          </a:prstGeom>
+          <a:noFill/>
+        </p:spPr>
+        <p:txBody>
+          <a:bodyPr wrap="none" rtlCol="0">
+            <a:spAutoFit/>
+          </a:bodyPr>
+          <a:lstStyle/>
+          <a:p>
+            <a:r>
+              <a:rPr kumimoji="1" lang="en-US" altLang="ja-JP" sz="2400" b="1" dirty="0">
+                <a:solidFill>
+                  <a:srgbClr val="0070C0"/>
+                </a:solidFill>
+              </a:rPr>
+              <a:t>switch</a:t>
+            </a:r>
+            <a:r>
+              <a:rPr kumimoji="1" lang="ja-JP" altLang="en-US" sz="2400" b="1" dirty="0">
+                <a:solidFill>
+                  <a:srgbClr val="0070C0"/>
+                </a:solidFill>
+              </a:rPr>
+              <a:t>文</a:t>
+            </a:r>
+            <a:r>
+              <a:rPr kumimoji="1" lang="ja-JP" altLang="en-US" sz="2400" dirty="0"/>
+              <a:t>による呼び出し関数の分岐</a:t>
+            </a:r>
+            <a:r>
+              <a:rPr lang="ja-JP" altLang="en-US" sz="2400" dirty="0"/>
+              <a:t>は</a:t>
+            </a:r>
+            <a:r>
+              <a:rPr lang="ja-JP" altLang="en-US" sz="2400" b="1" dirty="0">
+                <a:solidFill>
+                  <a:srgbClr val="FF0000"/>
+                </a:solidFill>
+              </a:rPr>
+              <a:t>関数ポインタ</a:t>
+            </a:r>
+            <a:r>
+              <a:rPr lang="ja-JP" altLang="en-US" sz="2400" dirty="0"/>
+              <a:t>を使いましょう。</a:t>
+            </a:r>
+            <a:endParaRPr kumimoji="1" lang="en-US" altLang="ja-JP" sz="2400" dirty="0"/>
+          </a:p>
+        </p:txBody>
+      </p:sp>
+      <p:pic>
+        <p:nvPicPr>
+          <p:cNvPr id="5" name="図 4">
+            <a:extLst>
+              <a:ext uri="{FF2B5EF4-FFF2-40B4-BE49-F238E27FC236}">
+                <a16:creationId xmlns:a16="http://schemas.microsoft.com/office/drawing/2014/main" id="{12F0D37C-DC7D-4807-9AE2-A2A99A2D06C2}"/>
+              </a:ext>
+            </a:extLst>
+          </p:cNvPr>
+          <p:cNvPicPr>
+            <a:picLocks noChangeAspect="1"/>
+          </p:cNvPicPr>
+          <p:nvPr/>
+        </p:nvPicPr>
+        <p:blipFill>
+          <a:blip r:embed="rId2"/>
+          <a:stretch>
+            <a:fillRect/>
+          </a:stretch>
+        </p:blipFill>
+        <p:spPr>
+          <a:xfrm>
+            <a:off x="567542" y="3018123"/>
+            <a:ext cx="1783913" cy="3299119"/>
+          </a:xfrm>
+          <a:prstGeom prst="rect">
+            <a:avLst/>
+          </a:prstGeom>
+        </p:spPr>
+      </p:pic>
+      <p:sp>
+        <p:nvSpPr>
+          <p:cNvPr id="10" name="テキスト ボックス 9">
+            <a:extLst>
+              <a:ext uri="{FF2B5EF4-FFF2-40B4-BE49-F238E27FC236}">
+                <a16:creationId xmlns:a16="http://schemas.microsoft.com/office/drawing/2014/main" id="{AC5E03B9-8E77-4611-915B-4071866591F9}"/>
+              </a:ext>
+            </a:extLst>
+          </p:cNvPr>
+          <p:cNvSpPr txBox="1"/>
+          <p:nvPr/>
+        </p:nvSpPr>
+        <p:spPr>
+          <a:xfrm>
+            <a:off x="567542" y="2556459"/>
+            <a:ext cx="1491114" cy="461665"/>
+          </a:xfrm>
+          <a:prstGeom prst="rect">
+            <a:avLst/>
+          </a:prstGeom>
+          <a:noFill/>
+        </p:spPr>
+        <p:txBody>
+          <a:bodyPr wrap="none" rtlCol="0">
+            <a:spAutoFit/>
+          </a:bodyPr>
+          <a:lstStyle/>
+          <a:p>
+            <a:r>
+              <a:rPr kumimoji="1" lang="ja-JP" altLang="en-US" sz="2400" b="1" dirty="0">
+                <a:solidFill>
+                  <a:srgbClr val="0070C0"/>
+                </a:solidFill>
+              </a:rPr>
+              <a:t>■</a:t>
+            </a:r>
+            <a:r>
+              <a:rPr kumimoji="1" lang="en-US" altLang="ja-JP" sz="2400" b="1" dirty="0">
+                <a:solidFill>
+                  <a:srgbClr val="0070C0"/>
+                </a:solidFill>
+              </a:rPr>
+              <a:t>Before</a:t>
+            </a:r>
+          </a:p>
+        </p:txBody>
+      </p:sp>
+      <p:sp>
+        <p:nvSpPr>
+          <p:cNvPr id="11" name="テキスト ボックス 10">
+            <a:extLst>
+              <a:ext uri="{FF2B5EF4-FFF2-40B4-BE49-F238E27FC236}">
+                <a16:creationId xmlns:a16="http://schemas.microsoft.com/office/drawing/2014/main" id="{BB803806-C77D-46AD-92D4-A4D4316C3408}"/>
+              </a:ext>
+            </a:extLst>
+          </p:cNvPr>
+          <p:cNvSpPr txBox="1"/>
+          <p:nvPr/>
+        </p:nvSpPr>
+        <p:spPr>
+          <a:xfrm>
+            <a:off x="5604445" y="2556458"/>
+            <a:ext cx="1237839" cy="461665"/>
+          </a:xfrm>
+          <a:prstGeom prst="rect">
+            <a:avLst/>
+          </a:prstGeom>
+          <a:noFill/>
+        </p:spPr>
+        <p:txBody>
+          <a:bodyPr wrap="none" rtlCol="0">
+            <a:spAutoFit/>
+          </a:bodyPr>
+          <a:lstStyle/>
+          <a:p>
+            <a:r>
+              <a:rPr kumimoji="1" lang="ja-JP" altLang="en-US" sz="2400" b="1" dirty="0">
+                <a:solidFill>
+                  <a:srgbClr val="FF0000"/>
+                </a:solidFill>
+              </a:rPr>
+              <a:t>■</a:t>
+            </a:r>
+            <a:r>
+              <a:rPr kumimoji="1" lang="en-US" altLang="ja-JP" sz="2400" b="1" dirty="0">
+                <a:solidFill>
+                  <a:srgbClr val="FF0000"/>
+                </a:solidFill>
+              </a:rPr>
+              <a:t>After</a:t>
+            </a:r>
+          </a:p>
+        </p:txBody>
+      </p:sp>
+      <p:pic>
+        <p:nvPicPr>
+          <p:cNvPr id="12" name="図 11">
+            <a:extLst>
+              <a:ext uri="{FF2B5EF4-FFF2-40B4-BE49-F238E27FC236}">
+                <a16:creationId xmlns:a16="http://schemas.microsoft.com/office/drawing/2014/main" id="{1B3E935D-84CB-46EA-83A2-D6DD8AE40535}"/>
+              </a:ext>
+            </a:extLst>
+          </p:cNvPr>
+          <p:cNvPicPr>
+            <a:picLocks noChangeAspect="1"/>
+          </p:cNvPicPr>
+          <p:nvPr/>
+        </p:nvPicPr>
+        <p:blipFill>
+          <a:blip r:embed="rId3"/>
+          <a:stretch>
+            <a:fillRect/>
+          </a:stretch>
+        </p:blipFill>
+        <p:spPr>
+          <a:xfrm>
+            <a:off x="5748867" y="3018123"/>
+            <a:ext cx="6008139" cy="3140795"/>
+          </a:xfrm>
+          <a:prstGeom prst="rect">
+            <a:avLst/>
+          </a:prstGeom>
+        </p:spPr>
+      </p:pic>
+    </p:spTree>
+    <p:extLst>
+      <p:ext uri="{BB962C8B-B14F-4D97-AF65-F5344CB8AC3E}">
+        <p14:creationId xmlns:p14="http://schemas.microsoft.com/office/powerpoint/2010/main" val="3288877915"/>
       </p:ext>
     </p:extLst>
   </p:cSld>

--- a/ゲーム科2年/01_後期/キャリアデザインⅢ/コードの質を上げる.pptx
+++ b/ゲーム科2年/01_後期/キャリアデザインⅢ/コードの質を上げる.pptx
@@ -6,12 +6,14 @@
   </p:sldMasterIdLst>
   <p:sldIdLst>
     <p:sldId id="257" r:id="rId2"/>
-    <p:sldId id="258" r:id="rId3"/>
-    <p:sldId id="259" r:id="rId4"/>
-    <p:sldId id="260" r:id="rId5"/>
-    <p:sldId id="261" r:id="rId6"/>
-    <p:sldId id="262" r:id="rId7"/>
-    <p:sldId id="263" r:id="rId8"/>
+    <p:sldId id="264" r:id="rId3"/>
+    <p:sldId id="265" r:id="rId4"/>
+    <p:sldId id="258" r:id="rId5"/>
+    <p:sldId id="259" r:id="rId6"/>
+    <p:sldId id="260" r:id="rId7"/>
+    <p:sldId id="261" r:id="rId8"/>
+    <p:sldId id="262" r:id="rId9"/>
+    <p:sldId id="263" r:id="rId10"/>
   </p:sldIdLst>
   <p:sldSz cx="12192000" cy="6858000"/>
   <p:notesSz cx="6858000" cy="9144000"/>
@@ -265,7 +267,7 @@
           <a:p>
             <a:fld id="{E9CC885B-4903-4D54-9A93-00025F12DED9}" type="datetimeFigureOut">
               <a:rPr kumimoji="1" lang="ja-JP" altLang="en-US" smtClean="0"/>
-              <a:t>2026/3/10</a:t>
+              <a:t>2026/3/11</a:t>
             </a:fld>
             <a:endParaRPr kumimoji="1" lang="ja-JP" altLang="en-US"/>
           </a:p>
@@ -495,7 +497,7 @@
           <a:p>
             <a:fld id="{E9CC885B-4903-4D54-9A93-00025F12DED9}" type="datetimeFigureOut">
               <a:rPr kumimoji="1" lang="ja-JP" altLang="en-US" smtClean="0"/>
-              <a:t>2026/3/10</a:t>
+              <a:t>2026/3/11</a:t>
             </a:fld>
             <a:endParaRPr kumimoji="1" lang="ja-JP" altLang="en-US"/>
           </a:p>
@@ -735,7 +737,7 @@
           <a:p>
             <a:fld id="{E9CC885B-4903-4D54-9A93-00025F12DED9}" type="datetimeFigureOut">
               <a:rPr kumimoji="1" lang="ja-JP" altLang="en-US" smtClean="0"/>
-              <a:t>2026/3/10</a:t>
+              <a:t>2026/3/11</a:t>
             </a:fld>
             <a:endParaRPr kumimoji="1" lang="ja-JP" altLang="en-US"/>
           </a:p>
@@ -965,7 +967,7 @@
           <a:p>
             <a:fld id="{E9CC885B-4903-4D54-9A93-00025F12DED9}" type="datetimeFigureOut">
               <a:rPr kumimoji="1" lang="ja-JP" altLang="en-US" smtClean="0"/>
-              <a:t>2026/3/10</a:t>
+              <a:t>2026/3/11</a:t>
             </a:fld>
             <a:endParaRPr kumimoji="1" lang="ja-JP" altLang="en-US"/>
           </a:p>
@@ -1240,7 +1242,7 @@
           <a:p>
             <a:fld id="{E9CC885B-4903-4D54-9A93-00025F12DED9}" type="datetimeFigureOut">
               <a:rPr kumimoji="1" lang="ja-JP" altLang="en-US" smtClean="0"/>
-              <a:t>2026/3/10</a:t>
+              <a:t>2026/3/11</a:t>
             </a:fld>
             <a:endParaRPr kumimoji="1" lang="ja-JP" altLang="en-US"/>
           </a:p>
@@ -1569,7 +1571,7 @@
           <a:p>
             <a:fld id="{E9CC885B-4903-4D54-9A93-00025F12DED9}" type="datetimeFigureOut">
               <a:rPr kumimoji="1" lang="ja-JP" altLang="en-US" smtClean="0"/>
-              <a:t>2026/3/10</a:t>
+              <a:t>2026/3/11</a:t>
             </a:fld>
             <a:endParaRPr kumimoji="1" lang="ja-JP" altLang="en-US"/>
           </a:p>
@@ -2045,7 +2047,7 @@
           <a:p>
             <a:fld id="{E9CC885B-4903-4D54-9A93-00025F12DED9}" type="datetimeFigureOut">
               <a:rPr kumimoji="1" lang="ja-JP" altLang="en-US" smtClean="0"/>
-              <a:t>2026/3/10</a:t>
+              <a:t>2026/3/11</a:t>
             </a:fld>
             <a:endParaRPr kumimoji="1" lang="ja-JP" altLang="en-US"/>
           </a:p>
@@ -2186,7 +2188,7 @@
           <a:p>
             <a:fld id="{E9CC885B-4903-4D54-9A93-00025F12DED9}" type="datetimeFigureOut">
               <a:rPr kumimoji="1" lang="ja-JP" altLang="en-US" smtClean="0"/>
-              <a:t>2026/3/10</a:t>
+              <a:t>2026/3/11</a:t>
             </a:fld>
             <a:endParaRPr kumimoji="1" lang="ja-JP" altLang="en-US"/>
           </a:p>
@@ -2299,7 +2301,7 @@
           <a:p>
             <a:fld id="{E9CC885B-4903-4D54-9A93-00025F12DED9}" type="datetimeFigureOut">
               <a:rPr kumimoji="1" lang="ja-JP" altLang="en-US" smtClean="0"/>
-              <a:t>2026/3/10</a:t>
+              <a:t>2026/3/11</a:t>
             </a:fld>
             <a:endParaRPr kumimoji="1" lang="ja-JP" altLang="en-US"/>
           </a:p>
@@ -2642,7 +2644,7 @@
           <a:p>
             <a:fld id="{E9CC885B-4903-4D54-9A93-00025F12DED9}" type="datetimeFigureOut">
               <a:rPr kumimoji="1" lang="ja-JP" altLang="en-US" smtClean="0"/>
-              <a:t>2026/3/10</a:t>
+              <a:t>2026/3/11</a:t>
             </a:fld>
             <a:endParaRPr kumimoji="1" lang="ja-JP" altLang="en-US"/>
           </a:p>
@@ -2930,7 +2932,7 @@
           <a:p>
             <a:fld id="{E9CC885B-4903-4D54-9A93-00025F12DED9}" type="datetimeFigureOut">
               <a:rPr kumimoji="1" lang="ja-JP" altLang="en-US" smtClean="0"/>
-              <a:t>2026/3/10</a:t>
+              <a:t>2026/3/11</a:t>
             </a:fld>
             <a:endParaRPr kumimoji="1" lang="ja-JP" altLang="en-US"/>
           </a:p>
@@ -3203,7 +3205,7 @@
           <a:p>
             <a:fld id="{E9CC885B-4903-4D54-9A93-00025F12DED9}" type="datetimeFigureOut">
               <a:rPr kumimoji="1" lang="ja-JP" altLang="en-US" smtClean="0"/>
-              <a:t>2026/3/10</a:t>
+              <a:t>2026/3/11</a:t>
             </a:fld>
             <a:endParaRPr kumimoji="1" lang="ja-JP" altLang="en-US"/>
           </a:p>
@@ -3816,7 +3818,7 @@
         <p:spPr>
           <a:xfrm>
             <a:off x="567542" y="491954"/>
-            <a:ext cx="2646878" cy="584775"/>
+            <a:ext cx="5109091" cy="584775"/>
           </a:xfrm>
           <a:prstGeom prst="rect">
             <a:avLst/>
@@ -3831,7 +3833,7 @@
           <a:p>
             <a:r>
               <a:rPr kumimoji="1" lang="ja-JP" altLang="en-US" sz="3200" b="1" u="sng" dirty="0"/>
-              <a:t>初期化リスト</a:t>
+              <a:t>説明以外のコメントは消す</a:t>
             </a:r>
             <a:endParaRPr kumimoji="1" lang="en-US" altLang="ja-JP" sz="3200" b="1" u="sng" dirty="0"/>
           </a:p>
@@ -3852,7 +3854,7 @@
         <p:spPr>
           <a:xfrm>
             <a:off x="567542" y="1216429"/>
-            <a:ext cx="9725739" cy="1200329"/>
+            <a:ext cx="8802410" cy="3416320"/>
           </a:xfrm>
           <a:prstGeom prst="rect">
             <a:avLst/>
@@ -3867,236 +3869,27 @@
           <a:p>
             <a:r>
               <a:rPr kumimoji="1" lang="ja-JP" altLang="en-US" sz="2400" dirty="0"/>
-              <a:t>コンストラクタに初期化処理を書くことは、</a:t>
+              <a:t>説明文以外のコメントは消しましょう。</a:t>
             </a:r>
             <a:endParaRPr kumimoji="1" lang="en-US" altLang="ja-JP" sz="2400" dirty="0"/>
           </a:p>
           <a:p>
-            <a:r>
-              <a:rPr lang="ja-JP" altLang="en-US" sz="2400" dirty="0"/>
-              <a:t>実はあまり効率が良くありません。</a:t>
-            </a:r>
-            <a:endParaRPr kumimoji="1" lang="en-US" altLang="ja-JP" sz="2400" dirty="0"/>
-          </a:p>
-          <a:p>
-            <a:r>
-              <a:rPr kumimoji="1" lang="ja-JP" altLang="en-US" sz="2400" dirty="0"/>
-              <a:t>メンバ変数の初期化は</a:t>
-            </a:r>
-            <a:r>
-              <a:rPr kumimoji="1" lang="ja-JP" altLang="en-US" sz="2400" b="1" dirty="0">
+            <a:endParaRPr lang="en-US" altLang="ja-JP" sz="2400" b="1" dirty="0">
+              <a:solidFill>
+                <a:srgbClr val="FF0000"/>
+              </a:solidFill>
+            </a:endParaRPr>
+          </a:p>
+          <a:p>
+            <a:r>
+              <a:rPr lang="ja-JP" altLang="en-US" sz="2400" b="1" dirty="0">
                 <a:solidFill>
                   <a:srgbClr val="FF0000"/>
                 </a:solidFill>
               </a:rPr>
-              <a:t>初期化リスト</a:t>
-            </a:r>
-            <a:r>
-              <a:rPr kumimoji="1" lang="ja-JP" altLang="en-US" sz="2400" dirty="0"/>
-              <a:t>に書くことが推奨されています。</a:t>
-            </a:r>
-            <a:endParaRPr kumimoji="1" lang="en-US" altLang="ja-JP" sz="2400" dirty="0"/>
-          </a:p>
-        </p:txBody>
-      </p:sp>
-      <p:pic>
-        <p:nvPicPr>
-          <p:cNvPr id="3" name="図 2">
-            <a:extLst>
-              <a:ext uri="{FF2B5EF4-FFF2-40B4-BE49-F238E27FC236}">
-                <a16:creationId xmlns:a16="http://schemas.microsoft.com/office/drawing/2014/main" id="{14452711-4E56-482E-AAAC-37CE269EEDA6}"/>
-              </a:ext>
-            </a:extLst>
-          </p:cNvPr>
-          <p:cNvPicPr>
-            <a:picLocks noChangeAspect="1"/>
-          </p:cNvPicPr>
-          <p:nvPr/>
-        </p:nvPicPr>
-        <p:blipFill>
-          <a:blip r:embed="rId2"/>
-          <a:stretch>
-            <a:fillRect/>
-          </a:stretch>
-        </p:blipFill>
-        <p:spPr>
-          <a:xfrm>
-            <a:off x="567542" y="3018124"/>
-            <a:ext cx="4102907" cy="1832478"/>
-          </a:xfrm>
-          <a:prstGeom prst="rect">
-            <a:avLst/>
-          </a:prstGeom>
-        </p:spPr>
-      </p:pic>
-      <p:sp>
-        <p:nvSpPr>
-          <p:cNvPr id="7" name="テキスト ボックス 6">
-            <a:extLst>
-              <a:ext uri="{FF2B5EF4-FFF2-40B4-BE49-F238E27FC236}">
-                <a16:creationId xmlns:a16="http://schemas.microsoft.com/office/drawing/2014/main" id="{6C35FBED-2EAC-46B9-88F3-4C6A25D427D1}"/>
-              </a:ext>
-            </a:extLst>
-          </p:cNvPr>
-          <p:cNvSpPr txBox="1"/>
-          <p:nvPr/>
-        </p:nvSpPr>
-        <p:spPr>
-          <a:xfrm>
-            <a:off x="567542" y="2556459"/>
-            <a:ext cx="1491114" cy="461665"/>
-          </a:xfrm>
-          <a:prstGeom prst="rect">
-            <a:avLst/>
-          </a:prstGeom>
-          <a:noFill/>
-        </p:spPr>
-        <p:txBody>
-          <a:bodyPr wrap="none" rtlCol="0">
-            <a:spAutoFit/>
-          </a:bodyPr>
-          <a:lstStyle/>
-          <a:p>
-            <a:r>
-              <a:rPr kumimoji="1" lang="ja-JP" altLang="en-US" sz="2400" b="1" dirty="0">
-                <a:solidFill>
-                  <a:srgbClr val="0070C0"/>
-                </a:solidFill>
-              </a:rPr>
-              <a:t>■</a:t>
-            </a:r>
-            <a:r>
-              <a:rPr kumimoji="1" lang="en-US" altLang="ja-JP" sz="2400" b="1" dirty="0">
-                <a:solidFill>
-                  <a:srgbClr val="0070C0"/>
-                </a:solidFill>
-              </a:rPr>
-              <a:t>Before</a:t>
-            </a:r>
-          </a:p>
-        </p:txBody>
-      </p:sp>
-      <p:pic>
-        <p:nvPicPr>
-          <p:cNvPr id="8" name="図 7">
-            <a:extLst>
-              <a:ext uri="{FF2B5EF4-FFF2-40B4-BE49-F238E27FC236}">
-                <a16:creationId xmlns:a16="http://schemas.microsoft.com/office/drawing/2014/main" id="{855FCDA7-2F06-4ADB-AC47-564D0E6AEDE5}"/>
-              </a:ext>
-            </a:extLst>
-          </p:cNvPr>
-          <p:cNvPicPr>
-            <a:picLocks noChangeAspect="1"/>
-          </p:cNvPicPr>
-          <p:nvPr/>
-        </p:nvPicPr>
-        <p:blipFill>
-          <a:blip r:embed="rId3"/>
-          <a:stretch>
-            <a:fillRect/>
-          </a:stretch>
-        </p:blipFill>
-        <p:spPr>
-          <a:xfrm>
-            <a:off x="5643864" y="3018124"/>
-            <a:ext cx="3941556" cy="1832477"/>
-          </a:xfrm>
-          <a:prstGeom prst="rect">
-            <a:avLst/>
-          </a:prstGeom>
-        </p:spPr>
-      </p:pic>
-      <p:sp>
-        <p:nvSpPr>
-          <p:cNvPr id="9" name="テキスト ボックス 8">
-            <a:extLst>
-              <a:ext uri="{FF2B5EF4-FFF2-40B4-BE49-F238E27FC236}">
-                <a16:creationId xmlns:a16="http://schemas.microsoft.com/office/drawing/2014/main" id="{8AD92146-2843-44BA-88E8-AF7811C0D680}"/>
-              </a:ext>
-            </a:extLst>
-          </p:cNvPr>
-          <p:cNvSpPr txBox="1"/>
-          <p:nvPr/>
-        </p:nvSpPr>
-        <p:spPr>
-          <a:xfrm>
-            <a:off x="5604445" y="2556458"/>
-            <a:ext cx="1237839" cy="461665"/>
-          </a:xfrm>
-          <a:prstGeom prst="rect">
-            <a:avLst/>
-          </a:prstGeom>
-          <a:noFill/>
-        </p:spPr>
-        <p:txBody>
-          <a:bodyPr wrap="none" rtlCol="0">
-            <a:spAutoFit/>
-          </a:bodyPr>
-          <a:lstStyle/>
-          <a:p>
-            <a:r>
-              <a:rPr kumimoji="1" lang="ja-JP" altLang="en-US" sz="2400" b="1" dirty="0">
-                <a:solidFill>
-                  <a:srgbClr val="FF0000"/>
-                </a:solidFill>
-              </a:rPr>
-              <a:t>■</a:t>
-            </a:r>
-            <a:r>
-              <a:rPr kumimoji="1" lang="en-US" altLang="ja-JP" sz="2400" b="1" dirty="0">
-                <a:solidFill>
-                  <a:srgbClr val="FF0000"/>
-                </a:solidFill>
-              </a:rPr>
-              <a:t>After</a:t>
-            </a:r>
-          </a:p>
-        </p:txBody>
-      </p:sp>
-      <p:sp>
-        <p:nvSpPr>
-          <p:cNvPr id="10" name="テキスト ボックス 9">
-            <a:extLst>
-              <a:ext uri="{FF2B5EF4-FFF2-40B4-BE49-F238E27FC236}">
-                <a16:creationId xmlns:a16="http://schemas.microsoft.com/office/drawing/2014/main" id="{14ADC4B7-6E49-48C7-BF29-A7D56FA8C8F9}"/>
-              </a:ext>
-            </a:extLst>
-          </p:cNvPr>
-          <p:cNvSpPr txBox="1"/>
-          <p:nvPr/>
-        </p:nvSpPr>
-        <p:spPr>
-          <a:xfrm>
-            <a:off x="567541" y="4933295"/>
-            <a:ext cx="11264622" cy="1200329"/>
-          </a:xfrm>
-          <a:prstGeom prst="rect">
-            <a:avLst/>
-          </a:prstGeom>
-          <a:noFill/>
-        </p:spPr>
-        <p:txBody>
-          <a:bodyPr wrap="none" rtlCol="0">
-            <a:spAutoFit/>
-          </a:bodyPr>
-          <a:lstStyle/>
-          <a:p>
-            <a:r>
-              <a:rPr lang="ja-JP" altLang="en-US" sz="2400" dirty="0"/>
-              <a:t>クラス生成時の処理の流れは、</a:t>
-            </a:r>
-            <a:endParaRPr lang="en-US" altLang="ja-JP" sz="2400" dirty="0"/>
-          </a:p>
-          <a:p>
-            <a:r>
-              <a:rPr kumimoji="1" lang="ja-JP" altLang="en-US" sz="2400" b="1" dirty="0">
-                <a:solidFill>
-                  <a:srgbClr val="FF0000"/>
-                </a:solidFill>
-              </a:rPr>
-              <a:t>デフォルト初期化（初期化リスト）→コンストラクタ</a:t>
-            </a:r>
-            <a:endParaRPr kumimoji="1" lang="en-US" altLang="ja-JP" sz="2400" b="1" dirty="0">
+              <a:t>■消すコメントの例</a:t>
+            </a:r>
+            <a:endParaRPr lang="en-US" altLang="ja-JP" sz="2400" b="1" dirty="0">
               <a:solidFill>
                 <a:srgbClr val="FF0000"/>
               </a:solidFill>
@@ -4104,17 +3897,48 @@
           </a:p>
           <a:p>
             <a:r>
+              <a:rPr kumimoji="1" lang="ja-JP" altLang="en-US" sz="2400" dirty="0"/>
+              <a:t>・後程復活させるかもしれない処理</a:t>
+            </a:r>
+            <a:endParaRPr kumimoji="1" lang="en-US" altLang="ja-JP" sz="2400" dirty="0"/>
+          </a:p>
+          <a:p>
+            <a:r>
+              <a:rPr kumimoji="1" lang="ja-JP" altLang="en-US" sz="2400" dirty="0"/>
+              <a:t>・テスト用に書いていた処理</a:t>
+            </a:r>
+            <a:endParaRPr kumimoji="1" lang="en-US" altLang="ja-JP" sz="2400" dirty="0"/>
+          </a:p>
+          <a:p>
+            <a:r>
               <a:rPr lang="ja-JP" altLang="en-US" sz="2400" dirty="0"/>
-              <a:t>となっているため、初期化リストで済ませればコンストラクタが軽くなります。</a:t>
+              <a:t>・消すのが怖いけどとりあえずコメントしてる処理</a:t>
             </a:r>
             <a:endParaRPr lang="en-US" altLang="ja-JP" sz="2400" dirty="0"/>
+          </a:p>
+          <a:p>
+            <a:endParaRPr kumimoji="1" lang="en-US" altLang="ja-JP" sz="2400" dirty="0"/>
+          </a:p>
+          <a:p>
+            <a:r>
+              <a:rPr lang="ja-JP" altLang="en-US" sz="2400" dirty="0"/>
+              <a:t>コメントはプログラムを読む人を混乱させる要因になります。</a:t>
+            </a:r>
+            <a:endParaRPr lang="en-US" altLang="ja-JP" sz="2400" dirty="0"/>
+          </a:p>
+          <a:p>
+            <a:r>
+              <a:rPr kumimoji="1" lang="ja-JP" altLang="en-US" sz="2400" dirty="0"/>
+              <a:t>必要のない記述は消しましょう。</a:t>
+            </a:r>
+            <a:endParaRPr kumimoji="1" lang="en-US" altLang="ja-JP" sz="2400" dirty="0"/>
           </a:p>
         </p:txBody>
       </p:sp>
     </p:spTree>
     <p:extLst>
       <p:ext uri="{BB962C8B-B14F-4D97-AF65-F5344CB8AC3E}">
-        <p14:creationId xmlns:p14="http://schemas.microsoft.com/office/powerpoint/2010/main" val="1992521373"/>
+        <p14:creationId xmlns:p14="http://schemas.microsoft.com/office/powerpoint/2010/main" val="1934904479"/>
       </p:ext>
     </p:extLst>
   </p:cSld>
@@ -4156,7 +3980,7 @@
         <p:spPr>
           <a:xfrm>
             <a:off x="567542" y="491954"/>
-            <a:ext cx="1826141" cy="584775"/>
+            <a:ext cx="3126177" cy="584775"/>
           </a:xfrm>
           <a:prstGeom prst="rect">
             <a:avLst/>
@@ -4170,8 +3994,12 @@
           <a:lstStyle/>
           <a:p>
             <a:r>
+              <a:rPr kumimoji="1" lang="en-US" altLang="ja-JP" sz="3200" b="1" u="sng" dirty="0"/>
+              <a:t>_DEBUG</a:t>
+            </a:r>
+            <a:r>
               <a:rPr kumimoji="1" lang="ja-JP" altLang="en-US" sz="3200" b="1" u="sng" dirty="0"/>
-              <a:t>参照渡し</a:t>
+              <a:t>マクロ</a:t>
             </a:r>
             <a:endParaRPr kumimoji="1" lang="en-US" altLang="ja-JP" sz="3200" b="1" u="sng" dirty="0"/>
           </a:p>
@@ -4192,7 +4020,7 @@
         <p:spPr>
           <a:xfrm>
             <a:off x="567542" y="1216429"/>
-            <a:ext cx="9110186" cy="830997"/>
+            <a:ext cx="6649577" cy="461665"/>
           </a:xfrm>
           <a:prstGeom prst="rect">
             <a:avLst/>
@@ -4207,26 +4035,19 @@
           <a:p>
             <a:r>
               <a:rPr kumimoji="1" lang="ja-JP" altLang="en-US" sz="2400" dirty="0"/>
-              <a:t>クラスや構造体など大きな変数の受け渡しは、</a:t>
-            </a:r>
-            <a:endParaRPr kumimoji="1" lang="en-US" altLang="ja-JP" sz="2400" dirty="0"/>
-          </a:p>
-          <a:p>
-            <a:r>
-              <a:rPr kumimoji="1" lang="ja-JP" altLang="en-US" sz="2400" dirty="0"/>
-              <a:t>値渡し（代入）ではなく</a:t>
-            </a:r>
-            <a:r>
-              <a:rPr kumimoji="1" lang="ja-JP" altLang="en-US" sz="2400" b="1" dirty="0">
+              <a:t>デバッグ用の処理は</a:t>
+            </a:r>
+            <a:r>
+              <a:rPr kumimoji="1" lang="en-US" altLang="ja-JP" sz="2400" b="1" dirty="0">
                 <a:solidFill>
-                  <a:srgbClr val="FF0000"/>
+                  <a:srgbClr val="7030A0"/>
                 </a:solidFill>
               </a:rPr>
-              <a:t>参照渡し</a:t>
-            </a:r>
-            <a:r>
-              <a:rPr kumimoji="1" lang="ja-JP" altLang="en-US" sz="2400" dirty="0"/>
-              <a:t>にすると処理が軽くなります。</a:t>
+              <a:t>_DEBUG</a:t>
+            </a:r>
+            <a:r>
+              <a:rPr lang="ja-JP" altLang="en-US" sz="2400" dirty="0"/>
+              <a:t>で括りましょう。</a:t>
             </a:r>
             <a:endParaRPr kumimoji="1" lang="en-US" altLang="ja-JP" sz="2400" dirty="0"/>
           </a:p>
@@ -4234,10 +4055,10 @@
       </p:sp>
       <p:pic>
         <p:nvPicPr>
-          <p:cNvPr id="5" name="図 4">
-            <a:extLst>
-              <a:ext uri="{FF2B5EF4-FFF2-40B4-BE49-F238E27FC236}">
-                <a16:creationId xmlns:a16="http://schemas.microsoft.com/office/drawing/2014/main" id="{B49CAE3A-0F83-4056-8B9C-9AE87FA0CB54}"/>
+          <p:cNvPr id="3" name="図 2">
+            <a:extLst>
+              <a:ext uri="{FF2B5EF4-FFF2-40B4-BE49-F238E27FC236}">
+                <a16:creationId xmlns:a16="http://schemas.microsoft.com/office/drawing/2014/main" id="{3B1A03A9-DCAE-4268-951B-6D95A499AC41}"/>
               </a:ext>
             </a:extLst>
           </p:cNvPr>
@@ -4254,50 +4075,20 @@
         </p:blipFill>
         <p:spPr>
           <a:xfrm>
-            <a:off x="567542" y="3018122"/>
-            <a:ext cx="4202191" cy="1680877"/>
+            <a:off x="567542" y="1817795"/>
+            <a:ext cx="10934176" cy="1384546"/>
           </a:xfrm>
           <a:prstGeom prst="rect">
             <a:avLst/>
           </a:prstGeom>
         </p:spPr>
       </p:pic>
-      <p:pic>
-        <p:nvPicPr>
-          <p:cNvPr id="12" name="図 11">
-            <a:extLst>
-              <a:ext uri="{FF2B5EF4-FFF2-40B4-BE49-F238E27FC236}">
-                <a16:creationId xmlns:a16="http://schemas.microsoft.com/office/drawing/2014/main" id="{D27A7880-FFD5-4D23-8618-9BB0CA47080B}"/>
-              </a:ext>
-            </a:extLst>
-          </p:cNvPr>
-          <p:cNvPicPr>
-            <a:picLocks noChangeAspect="1"/>
-          </p:cNvPicPr>
-          <p:nvPr/>
-        </p:nvPicPr>
-        <p:blipFill>
-          <a:blip r:embed="rId3"/>
-          <a:stretch>
-            <a:fillRect/>
-          </a:stretch>
-        </p:blipFill>
-        <p:spPr>
-          <a:xfrm>
-            <a:off x="5604445" y="3018122"/>
-            <a:ext cx="4202191" cy="1432565"/>
-          </a:xfrm>
-          <a:prstGeom prst="rect">
-            <a:avLst/>
-          </a:prstGeom>
-        </p:spPr>
-      </p:pic>
-      <p:sp>
-        <p:nvSpPr>
-          <p:cNvPr id="13" name="テキスト ボックス 12">
-            <a:extLst>
-              <a:ext uri="{FF2B5EF4-FFF2-40B4-BE49-F238E27FC236}">
-                <a16:creationId xmlns:a16="http://schemas.microsoft.com/office/drawing/2014/main" id="{9ADD7FEA-5C9B-4EB5-B16E-D46B5C61E910}"/>
+      <p:sp>
+        <p:nvSpPr>
+          <p:cNvPr id="7" name="テキスト ボックス 6">
+            <a:extLst>
+              <a:ext uri="{FF2B5EF4-FFF2-40B4-BE49-F238E27FC236}">
+                <a16:creationId xmlns:a16="http://schemas.microsoft.com/office/drawing/2014/main" id="{4176D749-358E-4412-A847-E7BE131AD67D}"/>
               </a:ext>
             </a:extLst>
           </p:cNvPr>
@@ -4306,8 +4097,8 @@
         </p:nvSpPr>
         <p:spPr>
           <a:xfrm>
-            <a:off x="567542" y="2556459"/>
-            <a:ext cx="1491114" cy="461665"/>
+            <a:off x="567542" y="3655660"/>
+            <a:ext cx="10341293" cy="830997"/>
           </a:xfrm>
           <a:prstGeom prst="rect">
             <a:avLst/>
@@ -4321,176 +4112,32 @@
           <a:lstStyle/>
           <a:p>
             <a:r>
-              <a:rPr kumimoji="1" lang="ja-JP" altLang="en-US" sz="2400" b="1" dirty="0">
-                <a:solidFill>
-                  <a:srgbClr val="0070C0"/>
-                </a:solidFill>
-              </a:rPr>
-              <a:t>■</a:t>
-            </a:r>
-            <a:r>
-              <a:rPr kumimoji="1" lang="en-US" altLang="ja-JP" sz="2400" b="1" dirty="0">
-                <a:solidFill>
-                  <a:srgbClr val="0070C0"/>
-                </a:solidFill>
-              </a:rPr>
-              <a:t>Before</a:t>
-            </a:r>
-          </a:p>
-        </p:txBody>
-      </p:sp>
-      <p:sp>
-        <p:nvSpPr>
-          <p:cNvPr id="14" name="テキスト ボックス 13">
-            <a:extLst>
-              <a:ext uri="{FF2B5EF4-FFF2-40B4-BE49-F238E27FC236}">
-                <a16:creationId xmlns:a16="http://schemas.microsoft.com/office/drawing/2014/main" id="{DDA9B379-29EC-4B0D-9D91-642EA2716537}"/>
-              </a:ext>
-            </a:extLst>
-          </p:cNvPr>
-          <p:cNvSpPr txBox="1"/>
-          <p:nvPr/>
-        </p:nvSpPr>
-        <p:spPr>
-          <a:xfrm>
-            <a:off x="5604445" y="2556458"/>
-            <a:ext cx="1237839" cy="461665"/>
-          </a:xfrm>
-          <a:prstGeom prst="rect">
-            <a:avLst/>
-          </a:prstGeom>
-          <a:noFill/>
-        </p:spPr>
-        <p:txBody>
-          <a:bodyPr wrap="none" rtlCol="0">
-            <a:spAutoFit/>
-          </a:bodyPr>
-          <a:lstStyle/>
-          <a:p>
-            <a:r>
-              <a:rPr kumimoji="1" lang="ja-JP" altLang="en-US" sz="2400" b="1" dirty="0">
-                <a:solidFill>
-                  <a:srgbClr val="FF0000"/>
-                </a:solidFill>
-              </a:rPr>
-              <a:t>■</a:t>
-            </a:r>
-            <a:r>
-              <a:rPr kumimoji="1" lang="en-US" altLang="ja-JP" sz="2400" b="1" dirty="0">
-                <a:solidFill>
-                  <a:srgbClr val="FF0000"/>
-                </a:solidFill>
-              </a:rPr>
-              <a:t>After</a:t>
-            </a:r>
-          </a:p>
-        </p:txBody>
-      </p:sp>
-      <p:sp>
-        <p:nvSpPr>
-          <p:cNvPr id="15" name="テキスト ボックス 14">
-            <a:extLst>
-              <a:ext uri="{FF2B5EF4-FFF2-40B4-BE49-F238E27FC236}">
-                <a16:creationId xmlns:a16="http://schemas.microsoft.com/office/drawing/2014/main" id="{3002F28B-F1DB-4DEC-ADA2-509B77126F97}"/>
-              </a:ext>
-            </a:extLst>
-          </p:cNvPr>
-          <p:cNvSpPr txBox="1"/>
-          <p:nvPr/>
-        </p:nvSpPr>
-        <p:spPr>
-          <a:xfrm>
-            <a:off x="567541" y="4933295"/>
-            <a:ext cx="9110186" cy="1569660"/>
-          </a:xfrm>
-          <a:prstGeom prst="rect">
-            <a:avLst/>
-          </a:prstGeom>
-          <a:noFill/>
-        </p:spPr>
-        <p:txBody>
-          <a:bodyPr wrap="none" rtlCol="0">
-            <a:spAutoFit/>
-          </a:bodyPr>
-          <a:lstStyle/>
-          <a:p>
-            <a:r>
-              <a:rPr lang="ja-JP" altLang="en-US" sz="2400" b="1" dirty="0">
-                <a:solidFill>
-                  <a:srgbClr val="FF0000"/>
-                </a:solidFill>
-              </a:rPr>
-              <a:t>値渡しはすべてのメンバ変数に対してコピー</a:t>
-            </a:r>
-            <a:r>
-              <a:rPr lang="ja-JP" altLang="en-US" sz="2400" dirty="0"/>
-              <a:t>が実行されますが、</a:t>
-            </a:r>
-            <a:endParaRPr lang="en-US" altLang="ja-JP" sz="2400" dirty="0"/>
-          </a:p>
-          <a:p>
-            <a:r>
-              <a:rPr lang="ja-JP" altLang="en-US" sz="2400" b="1" dirty="0">
-                <a:solidFill>
-                  <a:srgbClr val="FF0000"/>
-                </a:solidFill>
-              </a:rPr>
-              <a:t>参照渡しだと、アドレス１つのコピー</a:t>
-            </a:r>
-            <a:r>
-              <a:rPr lang="ja-JP" altLang="en-US" sz="2400" dirty="0"/>
-              <a:t>で完結します。</a:t>
-            </a:r>
-            <a:endParaRPr lang="en-US" altLang="ja-JP" sz="2400" dirty="0"/>
-          </a:p>
-          <a:p>
-            <a:endParaRPr lang="en-US" altLang="ja-JP" sz="2400" dirty="0"/>
-          </a:p>
-          <a:p>
-            <a:r>
-              <a:rPr lang="en-US" altLang="ja-JP" sz="2400" b="1" dirty="0">
-                <a:solidFill>
-                  <a:srgbClr val="00B050"/>
-                </a:solidFill>
-              </a:rPr>
-              <a:t>※</a:t>
-            </a:r>
-            <a:r>
-              <a:rPr lang="ja-JP" altLang="en-US" sz="2400" b="1" dirty="0">
-                <a:solidFill>
-                  <a:srgbClr val="00B050"/>
-                </a:solidFill>
-              </a:rPr>
-              <a:t>ただの</a:t>
-            </a:r>
-            <a:r>
-              <a:rPr lang="en-US" altLang="ja-JP" sz="2400" b="1" dirty="0">
-                <a:solidFill>
-                  <a:srgbClr val="00B050"/>
-                </a:solidFill>
-              </a:rPr>
-              <a:t>int</a:t>
-            </a:r>
-            <a:r>
-              <a:rPr lang="ja-JP" altLang="en-US" sz="2400" b="1" dirty="0">
-                <a:solidFill>
-                  <a:srgbClr val="00B050"/>
-                </a:solidFill>
-              </a:rPr>
-              <a:t>型などを参照渡しにしても効果はありません</a:t>
-            </a:r>
-            <a:endParaRPr lang="en-US" altLang="ja-JP" sz="2400" b="1" dirty="0">
-              <a:solidFill>
-                <a:srgbClr val="00B050"/>
-              </a:solidFill>
-            </a:endParaRPr>
+              <a:rPr kumimoji="1" lang="ja-JP" altLang="en-US" sz="2400" dirty="0"/>
+              <a:t>これで</a:t>
+            </a:r>
+            <a:r>
+              <a:rPr kumimoji="1" lang="en-US" altLang="ja-JP" sz="2400" dirty="0"/>
+              <a:t>Release</a:t>
+            </a:r>
+            <a:r>
+              <a:rPr kumimoji="1" lang="ja-JP" altLang="en-US" sz="2400" dirty="0"/>
+              <a:t>ビルド時に処理が無視されます。</a:t>
+            </a:r>
+            <a:endParaRPr kumimoji="1" lang="en-US" altLang="ja-JP" sz="2400" dirty="0"/>
+          </a:p>
+          <a:p>
+            <a:r>
+              <a:rPr lang="ja-JP" altLang="en-US" sz="2400"/>
+              <a:t>デバッグ用の表示（当たり判定表示や座標表示）はこれで括りましょう。</a:t>
+            </a:r>
+            <a:endParaRPr kumimoji="1" lang="en-US" altLang="ja-JP" sz="2400" dirty="0"/>
           </a:p>
         </p:txBody>
       </p:sp>
     </p:spTree>
     <p:extLst>
       <p:ext uri="{BB962C8B-B14F-4D97-AF65-F5344CB8AC3E}">
-        <p14:creationId xmlns:p14="http://schemas.microsoft.com/office/powerpoint/2010/main" val="4252101546"/>
+        <p14:creationId xmlns:p14="http://schemas.microsoft.com/office/powerpoint/2010/main" val="445844654"/>
       </p:ext>
     </p:extLst>
   </p:cSld>
@@ -4532,7 +4179,7 @@
         <p:spPr>
           <a:xfrm>
             <a:off x="567542" y="491954"/>
-            <a:ext cx="3861955" cy="584775"/>
+            <a:ext cx="2646878" cy="584775"/>
           </a:xfrm>
           <a:prstGeom prst="rect">
             <a:avLst/>
@@ -4546,16 +4193,8 @@
           <a:lstStyle/>
           <a:p>
             <a:r>
-              <a:rPr lang="en-US" altLang="ja-JP" sz="3200" b="1" u="sng" dirty="0"/>
-              <a:t>c</a:t>
-            </a:r>
-            <a:r>
-              <a:rPr kumimoji="1" lang="en-US" altLang="ja-JP" sz="3200" b="1" u="sng" dirty="0"/>
-              <a:t>onst</a:t>
-            </a:r>
-            <a:r>
-              <a:rPr lang="ja-JP" altLang="en-US" sz="3200" b="1" u="sng" dirty="0"/>
-              <a:t>修飾子 その１</a:t>
+              <a:rPr kumimoji="1" lang="ja-JP" altLang="en-US" sz="3200" b="1" u="sng" dirty="0"/>
+              <a:t>初期化リスト</a:t>
             </a:r>
             <a:endParaRPr kumimoji="1" lang="en-US" altLang="ja-JP" sz="3200" b="1" u="sng" dirty="0"/>
           </a:p>
@@ -4576,7 +4215,7 @@
         <p:spPr>
           <a:xfrm>
             <a:off x="567542" y="1216429"/>
-            <a:ext cx="10241906" cy="3416320"/>
+            <a:ext cx="9725739" cy="1200329"/>
           </a:xfrm>
           <a:prstGeom prst="rect">
             <a:avLst/>
@@ -4591,51 +4230,33 @@
           <a:p>
             <a:r>
               <a:rPr kumimoji="1" lang="ja-JP" altLang="en-US" sz="2400" dirty="0"/>
-              <a:t>参照先を書き換えてはいけないポインタ変数には</a:t>
-            </a:r>
-            <a:r>
-              <a:rPr kumimoji="1" lang="en-US" altLang="ja-JP" sz="2400" b="1" dirty="0">
+              <a:t>コンストラクタに初期化処理を書くことは、</a:t>
+            </a:r>
+            <a:endParaRPr kumimoji="1" lang="en-US" altLang="ja-JP" sz="2400" dirty="0"/>
+          </a:p>
+          <a:p>
+            <a:r>
+              <a:rPr lang="ja-JP" altLang="en-US" sz="2400" dirty="0"/>
+              <a:t>実はあまり効率が良くありません。</a:t>
+            </a:r>
+            <a:endParaRPr kumimoji="1" lang="en-US" altLang="ja-JP" sz="2400" dirty="0"/>
+          </a:p>
+          <a:p>
+            <a:r>
+              <a:rPr kumimoji="1" lang="ja-JP" altLang="en-US" sz="2400" dirty="0"/>
+              <a:t>メンバ変数の初期化は</a:t>
+            </a:r>
+            <a:r>
+              <a:rPr kumimoji="1" lang="ja-JP" altLang="en-US" sz="2400" b="1" dirty="0">
                 <a:solidFill>
-                  <a:srgbClr val="0070C0"/>
+                  <a:srgbClr val="FF0000"/>
                 </a:solidFill>
               </a:rPr>
-              <a:t>const</a:t>
+              <a:t>初期化リスト</a:t>
             </a:r>
             <a:r>
               <a:rPr kumimoji="1" lang="ja-JP" altLang="en-US" sz="2400" dirty="0"/>
-              <a:t>をつけましょう。</a:t>
-            </a:r>
-            <a:endParaRPr kumimoji="1" lang="en-US" altLang="ja-JP" sz="2400" dirty="0"/>
-          </a:p>
-          <a:p>
-            <a:endParaRPr lang="en-US" altLang="ja-JP" sz="2400" dirty="0"/>
-          </a:p>
-          <a:p>
-            <a:r>
-              <a:rPr lang="ja-JP" altLang="en-US" sz="2400" dirty="0"/>
-              <a:t>・当たり判定対象の引数</a:t>
-            </a:r>
-            <a:endParaRPr lang="en-US" altLang="ja-JP" sz="2400" dirty="0"/>
-          </a:p>
-          <a:p>
-            <a:endParaRPr kumimoji="1" lang="en-US" altLang="ja-JP" sz="2400" dirty="0"/>
-          </a:p>
-          <a:p>
-            <a:endParaRPr lang="en-US" altLang="ja-JP" sz="2400" dirty="0"/>
-          </a:p>
-          <a:p>
-            <a:endParaRPr kumimoji="1" lang="en-US" altLang="ja-JP" sz="2400" dirty="0"/>
-          </a:p>
-          <a:p>
-            <a:endParaRPr lang="en-US" altLang="ja-JP" sz="2400" dirty="0"/>
-          </a:p>
-          <a:p>
-            <a:endParaRPr kumimoji="1" lang="en-US" altLang="ja-JP" sz="2400" dirty="0"/>
-          </a:p>
-          <a:p>
-            <a:r>
-              <a:rPr lang="ja-JP" altLang="en-US" sz="2400" dirty="0"/>
-              <a:t>・ファイルパスなどの文字列</a:t>
+              <a:t>に書くことが推奨されています。</a:t>
             </a:r>
             <a:endParaRPr kumimoji="1" lang="en-US" altLang="ja-JP" sz="2400" dirty="0"/>
           </a:p>
@@ -4646,7 +4267,7 @@
           <p:cNvPr id="3" name="図 2">
             <a:extLst>
               <a:ext uri="{FF2B5EF4-FFF2-40B4-BE49-F238E27FC236}">
-                <a16:creationId xmlns:a16="http://schemas.microsoft.com/office/drawing/2014/main" id="{F2BFECCF-8A02-4579-BD6C-002F1A14C1FA}"/>
+                <a16:creationId xmlns:a16="http://schemas.microsoft.com/office/drawing/2014/main" id="{14452711-4E56-482E-AAAC-37CE269EEDA6}"/>
               </a:ext>
             </a:extLst>
           </p:cNvPr>
@@ -4663,20 +4284,67 @@
         </p:blipFill>
         <p:spPr>
           <a:xfrm>
-            <a:off x="567542" y="2413555"/>
-            <a:ext cx="5054325" cy="1301413"/>
+            <a:off x="567542" y="3018124"/>
+            <a:ext cx="4102907" cy="1832478"/>
           </a:xfrm>
           <a:prstGeom prst="rect">
             <a:avLst/>
           </a:prstGeom>
         </p:spPr>
       </p:pic>
+      <p:sp>
+        <p:nvSpPr>
+          <p:cNvPr id="7" name="テキスト ボックス 6">
+            <a:extLst>
+              <a:ext uri="{FF2B5EF4-FFF2-40B4-BE49-F238E27FC236}">
+                <a16:creationId xmlns:a16="http://schemas.microsoft.com/office/drawing/2014/main" id="{6C35FBED-2EAC-46B9-88F3-4C6A25D427D1}"/>
+              </a:ext>
+            </a:extLst>
+          </p:cNvPr>
+          <p:cNvSpPr txBox="1"/>
+          <p:nvPr/>
+        </p:nvSpPr>
+        <p:spPr>
+          <a:xfrm>
+            <a:off x="567542" y="2556459"/>
+            <a:ext cx="1491114" cy="461665"/>
+          </a:xfrm>
+          <a:prstGeom prst="rect">
+            <a:avLst/>
+          </a:prstGeom>
+          <a:noFill/>
+        </p:spPr>
+        <p:txBody>
+          <a:bodyPr wrap="none" rtlCol="0">
+            <a:spAutoFit/>
+          </a:bodyPr>
+          <a:lstStyle/>
+          <a:p>
+            <a:r>
+              <a:rPr kumimoji="1" lang="ja-JP" altLang="en-US" sz="2400" b="1" dirty="0">
+                <a:solidFill>
+                  <a:srgbClr val="0070C0"/>
+                </a:solidFill>
+              </a:rPr>
+              <a:t>■</a:t>
+            </a:r>
+            <a:r>
+              <a:rPr kumimoji="1" lang="en-US" altLang="ja-JP" sz="2400" b="1" dirty="0">
+                <a:solidFill>
+                  <a:srgbClr val="0070C0"/>
+                </a:solidFill>
+              </a:rPr>
+              <a:t>Before</a:t>
+            </a:r>
+          </a:p>
+        </p:txBody>
+      </p:sp>
       <p:pic>
         <p:nvPicPr>
           <p:cNvPr id="8" name="図 7">
             <a:extLst>
               <a:ext uri="{FF2B5EF4-FFF2-40B4-BE49-F238E27FC236}">
-                <a16:creationId xmlns:a16="http://schemas.microsoft.com/office/drawing/2014/main" id="{BADC767C-0ED0-42CF-908F-663B594E67E3}"/>
+                <a16:creationId xmlns:a16="http://schemas.microsoft.com/office/drawing/2014/main" id="{855FCDA7-2F06-4ADB-AC47-564D0E6AEDE5}"/>
               </a:ext>
             </a:extLst>
           </p:cNvPr>
@@ -4693,18 +4361,123 @@
         </p:blipFill>
         <p:spPr>
           <a:xfrm>
-            <a:off x="567542" y="4632749"/>
-            <a:ext cx="4537858" cy="1607902"/>
+            <a:off x="5643864" y="3018124"/>
+            <a:ext cx="3941556" cy="1832477"/>
           </a:xfrm>
           <a:prstGeom prst="rect">
             <a:avLst/>
           </a:prstGeom>
         </p:spPr>
       </p:pic>
+      <p:sp>
+        <p:nvSpPr>
+          <p:cNvPr id="9" name="テキスト ボックス 8">
+            <a:extLst>
+              <a:ext uri="{FF2B5EF4-FFF2-40B4-BE49-F238E27FC236}">
+                <a16:creationId xmlns:a16="http://schemas.microsoft.com/office/drawing/2014/main" id="{8AD92146-2843-44BA-88E8-AF7811C0D680}"/>
+              </a:ext>
+            </a:extLst>
+          </p:cNvPr>
+          <p:cNvSpPr txBox="1"/>
+          <p:nvPr/>
+        </p:nvSpPr>
+        <p:spPr>
+          <a:xfrm>
+            <a:off x="5604445" y="2556458"/>
+            <a:ext cx="1237839" cy="461665"/>
+          </a:xfrm>
+          <a:prstGeom prst="rect">
+            <a:avLst/>
+          </a:prstGeom>
+          <a:noFill/>
+        </p:spPr>
+        <p:txBody>
+          <a:bodyPr wrap="none" rtlCol="0">
+            <a:spAutoFit/>
+          </a:bodyPr>
+          <a:lstStyle/>
+          <a:p>
+            <a:r>
+              <a:rPr kumimoji="1" lang="ja-JP" altLang="en-US" sz="2400" b="1" dirty="0">
+                <a:solidFill>
+                  <a:srgbClr val="FF0000"/>
+                </a:solidFill>
+              </a:rPr>
+              <a:t>■</a:t>
+            </a:r>
+            <a:r>
+              <a:rPr kumimoji="1" lang="en-US" altLang="ja-JP" sz="2400" b="1" dirty="0">
+                <a:solidFill>
+                  <a:srgbClr val="FF0000"/>
+                </a:solidFill>
+              </a:rPr>
+              <a:t>After</a:t>
+            </a:r>
+          </a:p>
+        </p:txBody>
+      </p:sp>
+      <p:sp>
+        <p:nvSpPr>
+          <p:cNvPr id="10" name="テキスト ボックス 9">
+            <a:extLst>
+              <a:ext uri="{FF2B5EF4-FFF2-40B4-BE49-F238E27FC236}">
+                <a16:creationId xmlns:a16="http://schemas.microsoft.com/office/drawing/2014/main" id="{14ADC4B7-6E49-48C7-BF29-A7D56FA8C8F9}"/>
+              </a:ext>
+            </a:extLst>
+          </p:cNvPr>
+          <p:cNvSpPr txBox="1"/>
+          <p:nvPr/>
+        </p:nvSpPr>
+        <p:spPr>
+          <a:xfrm>
+            <a:off x="567541" y="4933295"/>
+            <a:ext cx="11264622" cy="1200329"/>
+          </a:xfrm>
+          <a:prstGeom prst="rect">
+            <a:avLst/>
+          </a:prstGeom>
+          <a:noFill/>
+        </p:spPr>
+        <p:txBody>
+          <a:bodyPr wrap="none" rtlCol="0">
+            <a:spAutoFit/>
+          </a:bodyPr>
+          <a:lstStyle/>
+          <a:p>
+            <a:r>
+              <a:rPr lang="ja-JP" altLang="en-US" sz="2400" dirty="0"/>
+              <a:t>クラス生成時の処理の流れは、</a:t>
+            </a:r>
+            <a:endParaRPr lang="en-US" altLang="ja-JP" sz="2400" dirty="0"/>
+          </a:p>
+          <a:p>
+            <a:r>
+              <a:rPr kumimoji="1" lang="ja-JP" altLang="en-US" sz="2400" b="1" dirty="0">
+                <a:solidFill>
+                  <a:srgbClr val="FF0000"/>
+                </a:solidFill>
+              </a:rPr>
+              <a:t>デフォルト初期化（初期化リスト）→コンストラクタ</a:t>
+            </a:r>
+            <a:endParaRPr kumimoji="1" lang="en-US" altLang="ja-JP" sz="2400" b="1" dirty="0">
+              <a:solidFill>
+                <a:srgbClr val="FF0000"/>
+              </a:solidFill>
+            </a:endParaRPr>
+          </a:p>
+          <a:p>
+            <a:r>
+              <a:rPr lang="ja-JP" altLang="en-US" sz="2400" dirty="0"/>
+              <a:t>となっているため、初期化リストで済ませればコンストラクタが軽くなります。</a:t>
+            </a:r>
+            <a:endParaRPr lang="en-US" altLang="ja-JP" sz="2400" dirty="0"/>
+          </a:p>
+        </p:txBody>
+      </p:sp>
     </p:spTree>
     <p:extLst>
       <p:ext uri="{BB962C8B-B14F-4D97-AF65-F5344CB8AC3E}">
-        <p14:creationId xmlns:p14="http://schemas.microsoft.com/office/powerpoint/2010/main" val="86562508"/>
+        <p14:creationId xmlns:p14="http://schemas.microsoft.com/office/powerpoint/2010/main" val="1992521373"/>
       </p:ext>
     </p:extLst>
   </p:cSld>
@@ -4746,7 +4519,7 @@
         <p:spPr>
           <a:xfrm>
             <a:off x="567542" y="491954"/>
-            <a:ext cx="3861955" cy="584775"/>
+            <a:ext cx="1826141" cy="584775"/>
           </a:xfrm>
           <a:prstGeom prst="rect">
             <a:avLst/>
@@ -4760,16 +4533,8 @@
           <a:lstStyle/>
           <a:p>
             <a:r>
-              <a:rPr lang="en-US" altLang="ja-JP" sz="3200" b="1" u="sng" dirty="0"/>
-              <a:t>c</a:t>
-            </a:r>
-            <a:r>
-              <a:rPr kumimoji="1" lang="en-US" altLang="ja-JP" sz="3200" b="1" u="sng" dirty="0"/>
-              <a:t>onst</a:t>
-            </a:r>
-            <a:r>
-              <a:rPr lang="ja-JP" altLang="en-US" sz="3200" b="1" u="sng" dirty="0"/>
-              <a:t>修飾子 その２</a:t>
+              <a:rPr kumimoji="1" lang="ja-JP" altLang="en-US" sz="3200" b="1" u="sng" dirty="0"/>
+              <a:t>参照渡し</a:t>
             </a:r>
             <a:endParaRPr kumimoji="1" lang="en-US" altLang="ja-JP" sz="3200" b="1" u="sng" dirty="0"/>
           </a:p>
@@ -4790,7 +4555,7 @@
         <p:spPr>
           <a:xfrm>
             <a:off x="567542" y="1216429"/>
-            <a:ext cx="10857459" cy="3046988"/>
+            <a:ext cx="9110186" cy="830997"/>
           </a:xfrm>
           <a:prstGeom prst="rect">
             <a:avLst/>
@@ -4805,59 +4570,37 @@
           <a:p>
             <a:r>
               <a:rPr kumimoji="1" lang="ja-JP" altLang="en-US" sz="2400" dirty="0"/>
-              <a:t>呼び出してもメンバ変数が変わらないメンバ関数には</a:t>
-            </a:r>
-            <a:r>
-              <a:rPr kumimoji="1" lang="en-US" altLang="ja-JP" sz="2400" b="1" dirty="0">
+              <a:t>クラスや構造体など大きな変数の受け渡しは、</a:t>
+            </a:r>
+            <a:endParaRPr kumimoji="1" lang="en-US" altLang="ja-JP" sz="2400" dirty="0"/>
+          </a:p>
+          <a:p>
+            <a:r>
+              <a:rPr kumimoji="1" lang="ja-JP" altLang="en-US" sz="2400" dirty="0"/>
+              <a:t>値渡し（代入）ではなく</a:t>
+            </a:r>
+            <a:r>
+              <a:rPr kumimoji="1" lang="ja-JP" altLang="en-US" sz="2400" b="1" dirty="0">
                 <a:solidFill>
-                  <a:srgbClr val="0070C0"/>
+                  <a:srgbClr val="FF0000"/>
                 </a:solidFill>
               </a:rPr>
-              <a:t>const</a:t>
+              <a:t>参照渡し</a:t>
             </a:r>
             <a:r>
               <a:rPr kumimoji="1" lang="ja-JP" altLang="en-US" sz="2400" dirty="0"/>
-              <a:t>をつけましょう。</a:t>
-            </a:r>
-            <a:endParaRPr kumimoji="1" lang="en-US" altLang="ja-JP" sz="2400" dirty="0"/>
-          </a:p>
-          <a:p>
-            <a:endParaRPr lang="en-US" altLang="ja-JP" sz="2400" dirty="0"/>
-          </a:p>
-          <a:p>
-            <a:r>
-              <a:rPr kumimoji="1" lang="ja-JP" altLang="en-US" sz="2400" dirty="0"/>
-              <a:t>・各ゲッター関数など</a:t>
-            </a:r>
-            <a:endParaRPr kumimoji="1" lang="en-US" altLang="ja-JP" sz="2400" dirty="0"/>
-          </a:p>
-          <a:p>
-            <a:endParaRPr lang="en-US" altLang="ja-JP" sz="2400" dirty="0"/>
-          </a:p>
-          <a:p>
-            <a:endParaRPr kumimoji="1" lang="en-US" altLang="ja-JP" sz="2400" dirty="0"/>
-          </a:p>
-          <a:p>
-            <a:r>
-              <a:rPr lang="en-US" altLang="ja-JP" sz="2400" dirty="0"/>
-              <a:t>or</a:t>
-            </a:r>
-            <a:endParaRPr kumimoji="1" lang="en-US" altLang="ja-JP" sz="2400" dirty="0"/>
-          </a:p>
-          <a:p>
-            <a:endParaRPr lang="en-US" altLang="ja-JP" sz="2400" dirty="0"/>
-          </a:p>
-          <a:p>
+              <a:t>にすると処理が軽くなります。</a:t>
+            </a:r>
             <a:endParaRPr kumimoji="1" lang="en-US" altLang="ja-JP" sz="2400" dirty="0"/>
           </a:p>
         </p:txBody>
       </p:sp>
       <p:pic>
         <p:nvPicPr>
-          <p:cNvPr id="15" name="図 14">
-            <a:extLst>
-              <a:ext uri="{FF2B5EF4-FFF2-40B4-BE49-F238E27FC236}">
-                <a16:creationId xmlns:a16="http://schemas.microsoft.com/office/drawing/2014/main" id="{F936FF4E-DDDD-4C76-A279-B5F9D4B0CAA7}"/>
+          <p:cNvPr id="5" name="図 4">
+            <a:extLst>
+              <a:ext uri="{FF2B5EF4-FFF2-40B4-BE49-F238E27FC236}">
+                <a16:creationId xmlns:a16="http://schemas.microsoft.com/office/drawing/2014/main" id="{B49CAE3A-0F83-4056-8B9C-9AE87FA0CB54}"/>
               </a:ext>
             </a:extLst>
           </p:cNvPr>
@@ -4874,8 +4617,8 @@
         </p:blipFill>
         <p:spPr>
           <a:xfrm>
-            <a:off x="567542" y="2333076"/>
-            <a:ext cx="4534533" cy="647790"/>
+            <a:off x="567542" y="3018122"/>
+            <a:ext cx="4202191" cy="1680877"/>
           </a:xfrm>
           <a:prstGeom prst="rect">
             <a:avLst/>
@@ -4884,10 +4627,10 @@
       </p:pic>
       <p:pic>
         <p:nvPicPr>
-          <p:cNvPr id="19" name="図 18">
-            <a:extLst>
-              <a:ext uri="{FF2B5EF4-FFF2-40B4-BE49-F238E27FC236}">
-                <a16:creationId xmlns:a16="http://schemas.microsoft.com/office/drawing/2014/main" id="{4C37AE9D-370F-44DF-9A57-05C2C309BA39}"/>
+          <p:cNvPr id="12" name="図 11">
+            <a:extLst>
+              <a:ext uri="{FF2B5EF4-FFF2-40B4-BE49-F238E27FC236}">
+                <a16:creationId xmlns:a16="http://schemas.microsoft.com/office/drawing/2014/main" id="{D27A7880-FFD5-4D23-8618-9BB0CA47080B}"/>
               </a:ext>
             </a:extLst>
           </p:cNvPr>
@@ -4904,18 +4647,213 @@
         </p:blipFill>
         <p:spPr>
           <a:xfrm>
-            <a:off x="567542" y="3567529"/>
-            <a:ext cx="6620799" cy="619211"/>
+            <a:off x="5604445" y="3018122"/>
+            <a:ext cx="4202191" cy="1432565"/>
           </a:xfrm>
           <a:prstGeom prst="rect">
             <a:avLst/>
           </a:prstGeom>
         </p:spPr>
       </p:pic>
+      <p:sp>
+        <p:nvSpPr>
+          <p:cNvPr id="13" name="テキスト ボックス 12">
+            <a:extLst>
+              <a:ext uri="{FF2B5EF4-FFF2-40B4-BE49-F238E27FC236}">
+                <a16:creationId xmlns:a16="http://schemas.microsoft.com/office/drawing/2014/main" id="{9ADD7FEA-5C9B-4EB5-B16E-D46B5C61E910}"/>
+              </a:ext>
+            </a:extLst>
+          </p:cNvPr>
+          <p:cNvSpPr txBox="1"/>
+          <p:nvPr/>
+        </p:nvSpPr>
+        <p:spPr>
+          <a:xfrm>
+            <a:off x="567542" y="2556459"/>
+            <a:ext cx="1491114" cy="461665"/>
+          </a:xfrm>
+          <a:prstGeom prst="rect">
+            <a:avLst/>
+          </a:prstGeom>
+          <a:noFill/>
+        </p:spPr>
+        <p:txBody>
+          <a:bodyPr wrap="none" rtlCol="0">
+            <a:spAutoFit/>
+          </a:bodyPr>
+          <a:lstStyle/>
+          <a:p>
+            <a:r>
+              <a:rPr kumimoji="1" lang="ja-JP" altLang="en-US" sz="2400" b="1" dirty="0">
+                <a:solidFill>
+                  <a:srgbClr val="0070C0"/>
+                </a:solidFill>
+              </a:rPr>
+              <a:t>■</a:t>
+            </a:r>
+            <a:r>
+              <a:rPr kumimoji="1" lang="en-US" altLang="ja-JP" sz="2400" b="1" dirty="0">
+                <a:solidFill>
+                  <a:srgbClr val="0070C0"/>
+                </a:solidFill>
+              </a:rPr>
+              <a:t>Before</a:t>
+            </a:r>
+          </a:p>
+        </p:txBody>
+      </p:sp>
+      <p:sp>
+        <p:nvSpPr>
+          <p:cNvPr id="14" name="テキスト ボックス 13">
+            <a:extLst>
+              <a:ext uri="{FF2B5EF4-FFF2-40B4-BE49-F238E27FC236}">
+                <a16:creationId xmlns:a16="http://schemas.microsoft.com/office/drawing/2014/main" id="{DDA9B379-29EC-4B0D-9D91-642EA2716537}"/>
+              </a:ext>
+            </a:extLst>
+          </p:cNvPr>
+          <p:cNvSpPr txBox="1"/>
+          <p:nvPr/>
+        </p:nvSpPr>
+        <p:spPr>
+          <a:xfrm>
+            <a:off x="5604445" y="2556458"/>
+            <a:ext cx="1237839" cy="461665"/>
+          </a:xfrm>
+          <a:prstGeom prst="rect">
+            <a:avLst/>
+          </a:prstGeom>
+          <a:noFill/>
+        </p:spPr>
+        <p:txBody>
+          <a:bodyPr wrap="none" rtlCol="0">
+            <a:spAutoFit/>
+          </a:bodyPr>
+          <a:lstStyle/>
+          <a:p>
+            <a:r>
+              <a:rPr kumimoji="1" lang="ja-JP" altLang="en-US" sz="2400" b="1" dirty="0">
+                <a:solidFill>
+                  <a:srgbClr val="FF0000"/>
+                </a:solidFill>
+              </a:rPr>
+              <a:t>■</a:t>
+            </a:r>
+            <a:r>
+              <a:rPr kumimoji="1" lang="en-US" altLang="ja-JP" sz="2400" b="1" dirty="0">
+                <a:solidFill>
+                  <a:srgbClr val="FF0000"/>
+                </a:solidFill>
+              </a:rPr>
+              <a:t>After</a:t>
+            </a:r>
+          </a:p>
+        </p:txBody>
+      </p:sp>
+      <p:sp>
+        <p:nvSpPr>
+          <p:cNvPr id="15" name="テキスト ボックス 14">
+            <a:extLst>
+              <a:ext uri="{FF2B5EF4-FFF2-40B4-BE49-F238E27FC236}">
+                <a16:creationId xmlns:a16="http://schemas.microsoft.com/office/drawing/2014/main" id="{3002F28B-F1DB-4DEC-ADA2-509B77126F97}"/>
+              </a:ext>
+            </a:extLst>
+          </p:cNvPr>
+          <p:cNvSpPr txBox="1"/>
+          <p:nvPr/>
+        </p:nvSpPr>
+        <p:spPr>
+          <a:xfrm>
+            <a:off x="567541" y="4933295"/>
+            <a:ext cx="9110186" cy="1569660"/>
+          </a:xfrm>
+          <a:prstGeom prst="rect">
+            <a:avLst/>
+          </a:prstGeom>
+          <a:noFill/>
+        </p:spPr>
+        <p:txBody>
+          <a:bodyPr wrap="none" rtlCol="0">
+            <a:spAutoFit/>
+          </a:bodyPr>
+          <a:lstStyle/>
+          <a:p>
+            <a:r>
+              <a:rPr lang="ja-JP" altLang="en-US" sz="2400" b="1" dirty="0">
+                <a:solidFill>
+                  <a:srgbClr val="FF0000"/>
+                </a:solidFill>
+              </a:rPr>
+              <a:t>値渡しはすべてのメンバ変数に対してコピー</a:t>
+            </a:r>
+            <a:r>
+              <a:rPr lang="ja-JP" altLang="en-US" sz="2400" dirty="0"/>
+              <a:t>が実行されますが、</a:t>
+            </a:r>
+            <a:endParaRPr lang="en-US" altLang="ja-JP" sz="2400" dirty="0"/>
+          </a:p>
+          <a:p>
+            <a:r>
+              <a:rPr lang="ja-JP" altLang="en-US" sz="2400" b="1" dirty="0">
+                <a:solidFill>
+                  <a:srgbClr val="FF0000"/>
+                </a:solidFill>
+              </a:rPr>
+              <a:t>参照渡しだと、アドレス１つのコピー</a:t>
+            </a:r>
+            <a:r>
+              <a:rPr lang="ja-JP" altLang="en-US" sz="2400" dirty="0"/>
+              <a:t>で完結します。</a:t>
+            </a:r>
+            <a:endParaRPr lang="en-US" altLang="ja-JP" sz="2400" dirty="0"/>
+          </a:p>
+          <a:p>
+            <a:endParaRPr lang="en-US" altLang="ja-JP" sz="2400" dirty="0"/>
+          </a:p>
+          <a:p>
+            <a:r>
+              <a:rPr lang="en-US" altLang="ja-JP" sz="2400" b="1" dirty="0">
+                <a:solidFill>
+                  <a:srgbClr val="00B050"/>
+                </a:solidFill>
+              </a:rPr>
+              <a:t>※</a:t>
+            </a:r>
+            <a:r>
+              <a:rPr lang="ja-JP" altLang="en-US" sz="2400" b="1" dirty="0">
+                <a:solidFill>
+                  <a:srgbClr val="00B050"/>
+                </a:solidFill>
+              </a:rPr>
+              <a:t>ただの</a:t>
+            </a:r>
+            <a:r>
+              <a:rPr lang="en-US" altLang="ja-JP" sz="2400" b="1" dirty="0">
+                <a:solidFill>
+                  <a:srgbClr val="00B050"/>
+                </a:solidFill>
+              </a:rPr>
+              <a:t>int</a:t>
+            </a:r>
+            <a:r>
+              <a:rPr lang="ja-JP" altLang="en-US" sz="2400" b="1" dirty="0">
+                <a:solidFill>
+                  <a:srgbClr val="00B050"/>
+                </a:solidFill>
+              </a:rPr>
+              <a:t>型などを参照渡しにしても効果はありません</a:t>
+            </a:r>
+            <a:endParaRPr lang="en-US" altLang="ja-JP" sz="2400" b="1" dirty="0">
+              <a:solidFill>
+                <a:srgbClr val="00B050"/>
+              </a:solidFill>
+            </a:endParaRPr>
+          </a:p>
+        </p:txBody>
+      </p:sp>
     </p:spTree>
     <p:extLst>
       <p:ext uri="{BB962C8B-B14F-4D97-AF65-F5344CB8AC3E}">
-        <p14:creationId xmlns:p14="http://schemas.microsoft.com/office/powerpoint/2010/main" val="1729654492"/>
+        <p14:creationId xmlns:p14="http://schemas.microsoft.com/office/powerpoint/2010/main" val="4252101546"/>
       </p:ext>
     </p:extLst>
   </p:cSld>
@@ -4957,6 +4895,431 @@
         <p:spPr>
           <a:xfrm>
             <a:off x="567542" y="491954"/>
+            <a:ext cx="3861955" cy="584775"/>
+          </a:xfrm>
+          <a:prstGeom prst="rect">
+            <a:avLst/>
+          </a:prstGeom>
+          <a:noFill/>
+        </p:spPr>
+        <p:txBody>
+          <a:bodyPr wrap="none" rtlCol="0">
+            <a:spAutoFit/>
+          </a:bodyPr>
+          <a:lstStyle/>
+          <a:p>
+            <a:r>
+              <a:rPr lang="en-US" altLang="ja-JP" sz="3200" b="1" u="sng" dirty="0"/>
+              <a:t>c</a:t>
+            </a:r>
+            <a:r>
+              <a:rPr kumimoji="1" lang="en-US" altLang="ja-JP" sz="3200" b="1" u="sng" dirty="0"/>
+              <a:t>onst</a:t>
+            </a:r>
+            <a:r>
+              <a:rPr lang="ja-JP" altLang="en-US" sz="3200" b="1" u="sng" dirty="0"/>
+              <a:t>修飾子 その１</a:t>
+            </a:r>
+            <a:endParaRPr kumimoji="1" lang="en-US" altLang="ja-JP" sz="3200" b="1" u="sng" dirty="0"/>
+          </a:p>
+        </p:txBody>
+      </p:sp>
+      <p:sp>
+        <p:nvSpPr>
+          <p:cNvPr id="6" name="テキスト ボックス 5">
+            <a:extLst>
+              <a:ext uri="{FF2B5EF4-FFF2-40B4-BE49-F238E27FC236}">
+                <a16:creationId xmlns:a16="http://schemas.microsoft.com/office/drawing/2014/main" id="{55830AD6-028B-4C4E-80BF-B70DFC1C3A46}"/>
+              </a:ext>
+            </a:extLst>
+          </p:cNvPr>
+          <p:cNvSpPr txBox="1"/>
+          <p:nvPr/>
+        </p:nvSpPr>
+        <p:spPr>
+          <a:xfrm>
+            <a:off x="567542" y="1216429"/>
+            <a:ext cx="10241906" cy="3416320"/>
+          </a:xfrm>
+          <a:prstGeom prst="rect">
+            <a:avLst/>
+          </a:prstGeom>
+          <a:noFill/>
+        </p:spPr>
+        <p:txBody>
+          <a:bodyPr wrap="none" rtlCol="0">
+            <a:spAutoFit/>
+          </a:bodyPr>
+          <a:lstStyle/>
+          <a:p>
+            <a:r>
+              <a:rPr kumimoji="1" lang="ja-JP" altLang="en-US" sz="2400" dirty="0"/>
+              <a:t>参照先を書き換えてはいけないポインタ変数には</a:t>
+            </a:r>
+            <a:r>
+              <a:rPr kumimoji="1" lang="en-US" altLang="ja-JP" sz="2400" b="1" dirty="0">
+                <a:solidFill>
+                  <a:srgbClr val="0070C0"/>
+                </a:solidFill>
+              </a:rPr>
+              <a:t>const</a:t>
+            </a:r>
+            <a:r>
+              <a:rPr kumimoji="1" lang="ja-JP" altLang="en-US" sz="2400" dirty="0"/>
+              <a:t>をつけましょう。</a:t>
+            </a:r>
+            <a:endParaRPr kumimoji="1" lang="en-US" altLang="ja-JP" sz="2400" dirty="0"/>
+          </a:p>
+          <a:p>
+            <a:endParaRPr lang="en-US" altLang="ja-JP" sz="2400" dirty="0"/>
+          </a:p>
+          <a:p>
+            <a:r>
+              <a:rPr lang="ja-JP" altLang="en-US" sz="2400" dirty="0"/>
+              <a:t>・当たり判定対象の引数</a:t>
+            </a:r>
+            <a:endParaRPr lang="en-US" altLang="ja-JP" sz="2400" dirty="0"/>
+          </a:p>
+          <a:p>
+            <a:endParaRPr kumimoji="1" lang="en-US" altLang="ja-JP" sz="2400" dirty="0"/>
+          </a:p>
+          <a:p>
+            <a:endParaRPr lang="en-US" altLang="ja-JP" sz="2400" dirty="0"/>
+          </a:p>
+          <a:p>
+            <a:endParaRPr kumimoji="1" lang="en-US" altLang="ja-JP" sz="2400" dirty="0"/>
+          </a:p>
+          <a:p>
+            <a:endParaRPr lang="en-US" altLang="ja-JP" sz="2400" dirty="0"/>
+          </a:p>
+          <a:p>
+            <a:endParaRPr kumimoji="1" lang="en-US" altLang="ja-JP" sz="2400" dirty="0"/>
+          </a:p>
+          <a:p>
+            <a:r>
+              <a:rPr lang="ja-JP" altLang="en-US" sz="2400" dirty="0"/>
+              <a:t>・ファイルパスなどの文字列</a:t>
+            </a:r>
+            <a:endParaRPr kumimoji="1" lang="en-US" altLang="ja-JP" sz="2400" dirty="0"/>
+          </a:p>
+        </p:txBody>
+      </p:sp>
+      <p:pic>
+        <p:nvPicPr>
+          <p:cNvPr id="3" name="図 2">
+            <a:extLst>
+              <a:ext uri="{FF2B5EF4-FFF2-40B4-BE49-F238E27FC236}">
+                <a16:creationId xmlns:a16="http://schemas.microsoft.com/office/drawing/2014/main" id="{F2BFECCF-8A02-4579-BD6C-002F1A14C1FA}"/>
+              </a:ext>
+            </a:extLst>
+          </p:cNvPr>
+          <p:cNvPicPr>
+            <a:picLocks noChangeAspect="1"/>
+          </p:cNvPicPr>
+          <p:nvPr/>
+        </p:nvPicPr>
+        <p:blipFill>
+          <a:blip r:embed="rId2"/>
+          <a:stretch>
+            <a:fillRect/>
+          </a:stretch>
+        </p:blipFill>
+        <p:spPr>
+          <a:xfrm>
+            <a:off x="567542" y="2413555"/>
+            <a:ext cx="5054325" cy="1301413"/>
+          </a:xfrm>
+          <a:prstGeom prst="rect">
+            <a:avLst/>
+          </a:prstGeom>
+        </p:spPr>
+      </p:pic>
+      <p:pic>
+        <p:nvPicPr>
+          <p:cNvPr id="8" name="図 7">
+            <a:extLst>
+              <a:ext uri="{FF2B5EF4-FFF2-40B4-BE49-F238E27FC236}">
+                <a16:creationId xmlns:a16="http://schemas.microsoft.com/office/drawing/2014/main" id="{BADC767C-0ED0-42CF-908F-663B594E67E3}"/>
+              </a:ext>
+            </a:extLst>
+          </p:cNvPr>
+          <p:cNvPicPr>
+            <a:picLocks noChangeAspect="1"/>
+          </p:cNvPicPr>
+          <p:nvPr/>
+        </p:nvPicPr>
+        <p:blipFill>
+          <a:blip r:embed="rId3"/>
+          <a:stretch>
+            <a:fillRect/>
+          </a:stretch>
+        </p:blipFill>
+        <p:spPr>
+          <a:xfrm>
+            <a:off x="567542" y="4632749"/>
+            <a:ext cx="4537858" cy="1607902"/>
+          </a:xfrm>
+          <a:prstGeom prst="rect">
+            <a:avLst/>
+          </a:prstGeom>
+        </p:spPr>
+      </p:pic>
+    </p:spTree>
+    <p:extLst>
+      <p:ext uri="{BB962C8B-B14F-4D97-AF65-F5344CB8AC3E}">
+        <p14:creationId xmlns:p14="http://schemas.microsoft.com/office/powerpoint/2010/main" val="86562508"/>
+      </p:ext>
+    </p:extLst>
+  </p:cSld>
+  <p:clrMapOvr>
+    <a:masterClrMapping/>
+  </p:clrMapOvr>
+</p:sld>
+</file>
+
+<file path=ppt/slides/slide7.xml><?xml version="1.0" encoding="utf-8"?>
+<p:sld xmlns:a="http://schemas.openxmlformats.org/drawingml/2006/main" xmlns:r="http://schemas.openxmlformats.org/officeDocument/2006/relationships" xmlns:p="http://schemas.openxmlformats.org/presentationml/2006/main">
+  <p:cSld>
+    <p:spTree>
+      <p:nvGrpSpPr>
+        <p:cNvPr id="1" name=""/>
+        <p:cNvGrpSpPr/>
+        <p:nvPr/>
+      </p:nvGrpSpPr>
+      <p:grpSpPr>
+        <a:xfrm>
+          <a:off x="0" y="0"/>
+          <a:ext cx="0" cy="0"/>
+          <a:chOff x="0" y="0"/>
+          <a:chExt cx="0" cy="0"/>
+        </a:xfrm>
+      </p:grpSpPr>
+      <p:sp>
+        <p:nvSpPr>
+          <p:cNvPr id="4" name="テキスト ボックス 3">
+            <a:extLst>
+              <a:ext uri="{FF2B5EF4-FFF2-40B4-BE49-F238E27FC236}">
+                <a16:creationId xmlns:a16="http://schemas.microsoft.com/office/drawing/2014/main" id="{5A13BF46-B8C5-48AA-8308-C9ECFF431A18}"/>
+              </a:ext>
+            </a:extLst>
+          </p:cNvPr>
+          <p:cNvSpPr txBox="1"/>
+          <p:nvPr/>
+        </p:nvSpPr>
+        <p:spPr>
+          <a:xfrm>
+            <a:off x="567542" y="491954"/>
+            <a:ext cx="3861955" cy="584775"/>
+          </a:xfrm>
+          <a:prstGeom prst="rect">
+            <a:avLst/>
+          </a:prstGeom>
+          <a:noFill/>
+        </p:spPr>
+        <p:txBody>
+          <a:bodyPr wrap="none" rtlCol="0">
+            <a:spAutoFit/>
+          </a:bodyPr>
+          <a:lstStyle/>
+          <a:p>
+            <a:r>
+              <a:rPr lang="en-US" altLang="ja-JP" sz="3200" b="1" u="sng" dirty="0"/>
+              <a:t>c</a:t>
+            </a:r>
+            <a:r>
+              <a:rPr kumimoji="1" lang="en-US" altLang="ja-JP" sz="3200" b="1" u="sng" dirty="0"/>
+              <a:t>onst</a:t>
+            </a:r>
+            <a:r>
+              <a:rPr lang="ja-JP" altLang="en-US" sz="3200" b="1" u="sng" dirty="0"/>
+              <a:t>修飾子 その２</a:t>
+            </a:r>
+            <a:endParaRPr kumimoji="1" lang="en-US" altLang="ja-JP" sz="3200" b="1" u="sng" dirty="0"/>
+          </a:p>
+        </p:txBody>
+      </p:sp>
+      <p:sp>
+        <p:nvSpPr>
+          <p:cNvPr id="6" name="テキスト ボックス 5">
+            <a:extLst>
+              <a:ext uri="{FF2B5EF4-FFF2-40B4-BE49-F238E27FC236}">
+                <a16:creationId xmlns:a16="http://schemas.microsoft.com/office/drawing/2014/main" id="{55830AD6-028B-4C4E-80BF-B70DFC1C3A46}"/>
+              </a:ext>
+            </a:extLst>
+          </p:cNvPr>
+          <p:cNvSpPr txBox="1"/>
+          <p:nvPr/>
+        </p:nvSpPr>
+        <p:spPr>
+          <a:xfrm>
+            <a:off x="567542" y="1216429"/>
+            <a:ext cx="10857459" cy="3046988"/>
+          </a:xfrm>
+          <a:prstGeom prst="rect">
+            <a:avLst/>
+          </a:prstGeom>
+          <a:noFill/>
+        </p:spPr>
+        <p:txBody>
+          <a:bodyPr wrap="none" rtlCol="0">
+            <a:spAutoFit/>
+          </a:bodyPr>
+          <a:lstStyle/>
+          <a:p>
+            <a:r>
+              <a:rPr kumimoji="1" lang="ja-JP" altLang="en-US" sz="2400" dirty="0"/>
+              <a:t>呼び出してもメンバ変数が変わらないメンバ関数には</a:t>
+            </a:r>
+            <a:r>
+              <a:rPr kumimoji="1" lang="en-US" altLang="ja-JP" sz="2400" b="1" dirty="0">
+                <a:solidFill>
+                  <a:srgbClr val="0070C0"/>
+                </a:solidFill>
+              </a:rPr>
+              <a:t>const</a:t>
+            </a:r>
+            <a:r>
+              <a:rPr kumimoji="1" lang="ja-JP" altLang="en-US" sz="2400" dirty="0"/>
+              <a:t>をつけましょう。</a:t>
+            </a:r>
+            <a:endParaRPr kumimoji="1" lang="en-US" altLang="ja-JP" sz="2400" dirty="0"/>
+          </a:p>
+          <a:p>
+            <a:endParaRPr lang="en-US" altLang="ja-JP" sz="2400" dirty="0"/>
+          </a:p>
+          <a:p>
+            <a:r>
+              <a:rPr kumimoji="1" lang="ja-JP" altLang="en-US" sz="2400" dirty="0"/>
+              <a:t>・各ゲッター関数など</a:t>
+            </a:r>
+            <a:endParaRPr kumimoji="1" lang="en-US" altLang="ja-JP" sz="2400" dirty="0"/>
+          </a:p>
+          <a:p>
+            <a:endParaRPr lang="en-US" altLang="ja-JP" sz="2400" dirty="0"/>
+          </a:p>
+          <a:p>
+            <a:endParaRPr kumimoji="1" lang="en-US" altLang="ja-JP" sz="2400" dirty="0"/>
+          </a:p>
+          <a:p>
+            <a:r>
+              <a:rPr lang="en-US" altLang="ja-JP" sz="2400" dirty="0"/>
+              <a:t>or</a:t>
+            </a:r>
+            <a:endParaRPr kumimoji="1" lang="en-US" altLang="ja-JP" sz="2400" dirty="0"/>
+          </a:p>
+          <a:p>
+            <a:endParaRPr lang="en-US" altLang="ja-JP" sz="2400" dirty="0"/>
+          </a:p>
+          <a:p>
+            <a:endParaRPr kumimoji="1" lang="en-US" altLang="ja-JP" sz="2400" dirty="0"/>
+          </a:p>
+        </p:txBody>
+      </p:sp>
+      <p:pic>
+        <p:nvPicPr>
+          <p:cNvPr id="15" name="図 14">
+            <a:extLst>
+              <a:ext uri="{FF2B5EF4-FFF2-40B4-BE49-F238E27FC236}">
+                <a16:creationId xmlns:a16="http://schemas.microsoft.com/office/drawing/2014/main" id="{F936FF4E-DDDD-4C76-A279-B5F9D4B0CAA7}"/>
+              </a:ext>
+            </a:extLst>
+          </p:cNvPr>
+          <p:cNvPicPr>
+            <a:picLocks noChangeAspect="1"/>
+          </p:cNvPicPr>
+          <p:nvPr/>
+        </p:nvPicPr>
+        <p:blipFill>
+          <a:blip r:embed="rId2"/>
+          <a:stretch>
+            <a:fillRect/>
+          </a:stretch>
+        </p:blipFill>
+        <p:spPr>
+          <a:xfrm>
+            <a:off x="567542" y="2333076"/>
+            <a:ext cx="4534533" cy="647790"/>
+          </a:xfrm>
+          <a:prstGeom prst="rect">
+            <a:avLst/>
+          </a:prstGeom>
+        </p:spPr>
+      </p:pic>
+      <p:pic>
+        <p:nvPicPr>
+          <p:cNvPr id="19" name="図 18">
+            <a:extLst>
+              <a:ext uri="{FF2B5EF4-FFF2-40B4-BE49-F238E27FC236}">
+                <a16:creationId xmlns:a16="http://schemas.microsoft.com/office/drawing/2014/main" id="{4C37AE9D-370F-44DF-9A57-05C2C309BA39}"/>
+              </a:ext>
+            </a:extLst>
+          </p:cNvPr>
+          <p:cNvPicPr>
+            <a:picLocks noChangeAspect="1"/>
+          </p:cNvPicPr>
+          <p:nvPr/>
+        </p:nvPicPr>
+        <p:blipFill>
+          <a:blip r:embed="rId3"/>
+          <a:stretch>
+            <a:fillRect/>
+          </a:stretch>
+        </p:blipFill>
+        <p:spPr>
+          <a:xfrm>
+            <a:off x="567542" y="3567529"/>
+            <a:ext cx="6620799" cy="619211"/>
+          </a:xfrm>
+          <a:prstGeom prst="rect">
+            <a:avLst/>
+          </a:prstGeom>
+        </p:spPr>
+      </p:pic>
+    </p:spTree>
+    <p:extLst>
+      <p:ext uri="{BB962C8B-B14F-4D97-AF65-F5344CB8AC3E}">
+        <p14:creationId xmlns:p14="http://schemas.microsoft.com/office/powerpoint/2010/main" val="1729654492"/>
+      </p:ext>
+    </p:extLst>
+  </p:cSld>
+  <p:clrMapOvr>
+    <a:masterClrMapping/>
+  </p:clrMapOvr>
+</p:sld>
+</file>
+
+<file path=ppt/slides/slide8.xml><?xml version="1.0" encoding="utf-8"?>
+<p:sld xmlns:a="http://schemas.openxmlformats.org/drawingml/2006/main" xmlns:r="http://schemas.openxmlformats.org/officeDocument/2006/relationships" xmlns:p="http://schemas.openxmlformats.org/presentationml/2006/main">
+  <p:cSld>
+    <p:spTree>
+      <p:nvGrpSpPr>
+        <p:cNvPr id="1" name=""/>
+        <p:cNvGrpSpPr/>
+        <p:nvPr/>
+      </p:nvGrpSpPr>
+      <p:grpSpPr>
+        <a:xfrm>
+          <a:off x="0" y="0"/>
+          <a:ext cx="0" cy="0"/>
+          <a:chOff x="0" y="0"/>
+          <a:chExt cx="0" cy="0"/>
+        </a:xfrm>
+      </p:grpSpPr>
+      <p:sp>
+        <p:nvSpPr>
+          <p:cNvPr id="4" name="テキスト ボックス 3">
+            <a:extLst>
+              <a:ext uri="{FF2B5EF4-FFF2-40B4-BE49-F238E27FC236}">
+                <a16:creationId xmlns:a16="http://schemas.microsoft.com/office/drawing/2014/main" id="{5A13BF46-B8C5-48AA-8308-C9ECFF431A18}"/>
+              </a:ext>
+            </a:extLst>
+          </p:cNvPr>
+          <p:cNvSpPr txBox="1"/>
+          <p:nvPr/>
+        </p:nvSpPr>
+        <p:spPr>
+          <a:xfrm>
+            <a:off x="567542" y="491954"/>
             <a:ext cx="3504486" cy="584775"/>
           </a:xfrm>
           <a:prstGeom prst="rect">
@@ -5191,7 +5554,7 @@
 </p:sld>
 </file>
 
-<file path=ppt/slides/slide7.xml><?xml version="1.0" encoding="utf-8"?>
+<file path=ppt/slides/slide9.xml><?xml version="1.0" encoding="utf-8"?>
 <p:sld xmlns:a="http://schemas.openxmlformats.org/drawingml/2006/main" xmlns:r="http://schemas.openxmlformats.org/officeDocument/2006/relationships" xmlns:p="http://schemas.openxmlformats.org/presentationml/2006/main">
   <p:cSld>
     <p:spTree>
